--- a/AI-tools/AI-Talk-LessTechnical/AI-5-HowBigCompaniesCollectDataAndUseIt-Finance.pptx
+++ b/AI-tools/AI-Talk-LessTechnical/AI-5-HowBigCompaniesCollectDataAndUseIt-Finance.pptx
@@ -5,35 +5,39 @@
     <p:sldMasterId id="2147483648" r:id="rId1"/>
   </p:sldMasterIdLst>
   <p:notesMasterIdLst>
-    <p:notesMasterId r:id="rId25"/>
+    <p:notesMasterId r:id="rId29"/>
   </p:notesMasterIdLst>
   <p:handoutMasterIdLst>
-    <p:handoutMasterId r:id="rId26"/>
+    <p:handoutMasterId r:id="rId30"/>
   </p:handoutMasterIdLst>
   <p:sldIdLst>
     <p:sldId id="276" r:id="rId2"/>
     <p:sldId id="257" r:id="rId3"/>
-    <p:sldId id="277" r:id="rId4"/>
-    <p:sldId id="278" r:id="rId5"/>
-    <p:sldId id="279" r:id="rId6"/>
-    <p:sldId id="280" r:id="rId7"/>
-    <p:sldId id="281" r:id="rId8"/>
-    <p:sldId id="282" r:id="rId9"/>
-    <p:sldId id="283" r:id="rId10"/>
-    <p:sldId id="284" r:id="rId11"/>
-    <p:sldId id="285" r:id="rId12"/>
-    <p:sldId id="286" r:id="rId13"/>
-    <p:sldId id="287" r:id="rId14"/>
-    <p:sldId id="289" r:id="rId15"/>
-    <p:sldId id="288" r:id="rId16"/>
-    <p:sldId id="290" r:id="rId17"/>
-    <p:sldId id="291" r:id="rId18"/>
-    <p:sldId id="292" r:id="rId19"/>
-    <p:sldId id="293" r:id="rId20"/>
-    <p:sldId id="294" r:id="rId21"/>
-    <p:sldId id="295" r:id="rId22"/>
-    <p:sldId id="296" r:id="rId23"/>
-    <p:sldId id="275" r:id="rId24"/>
+    <p:sldId id="297" r:id="rId4"/>
+    <p:sldId id="298" r:id="rId5"/>
+    <p:sldId id="299" r:id="rId6"/>
+    <p:sldId id="277" r:id="rId7"/>
+    <p:sldId id="278" r:id="rId8"/>
+    <p:sldId id="300" r:id="rId9"/>
+    <p:sldId id="279" r:id="rId10"/>
+    <p:sldId id="280" r:id="rId11"/>
+    <p:sldId id="281" r:id="rId12"/>
+    <p:sldId id="282" r:id="rId13"/>
+    <p:sldId id="283" r:id="rId14"/>
+    <p:sldId id="284" r:id="rId15"/>
+    <p:sldId id="285" r:id="rId16"/>
+    <p:sldId id="286" r:id="rId17"/>
+    <p:sldId id="287" r:id="rId18"/>
+    <p:sldId id="289" r:id="rId19"/>
+    <p:sldId id="288" r:id="rId20"/>
+    <p:sldId id="290" r:id="rId21"/>
+    <p:sldId id="291" r:id="rId22"/>
+    <p:sldId id="292" r:id="rId23"/>
+    <p:sldId id="293" r:id="rId24"/>
+    <p:sldId id="294" r:id="rId25"/>
+    <p:sldId id="295" r:id="rId26"/>
+    <p:sldId id="296" r:id="rId27"/>
+    <p:sldId id="275" r:id="rId28"/>
   </p:sldIdLst>
   <p:sldSz cx="12192000" cy="6858000"/>
   <p:notesSz cx="6858000" cy="9144000"/>
@@ -237,7 +241,7 @@
           <a:p>
             <a:fld id="{7BAEECA8-D063-486F-AE31-5020270C1449}" type="datetimeFigureOut">
               <a:rPr lang="en-US" smtClean="0"/>
-              <a:t>5/24/2026</a:t>
+              <a:t>5/27/2026</a:t>
             </a:fld>
             <a:endParaRPr lang="en-US"/>
           </a:p>
@@ -414,7 +418,7 @@
           <a:p>
             <a:fld id="{CB233BD1-3BA8-448D-9D08-7846095EA517}" type="datetimeFigureOut">
               <a:rPr lang="en-US" smtClean="0"/>
-              <a:t>5/24/2026</a:t>
+              <a:t>5/27/2026</a:t>
             </a:fld>
             <a:endParaRPr lang="en-US"/>
           </a:p>
@@ -828,7 +832,7 @@
           <a:p>
             <a:fld id="{6383FAE1-13DE-4511-8C1B-C8AFB720664C}" type="datetimeFigureOut">
               <a:rPr lang="en-US" smtClean="0"/>
-              <a:t>5/24/2026</a:t>
+              <a:t>5/27/2026</a:t>
             </a:fld>
             <a:endParaRPr lang="en-US"/>
           </a:p>
@@ -1026,7 +1030,7 @@
           <a:p>
             <a:fld id="{6383FAE1-13DE-4511-8C1B-C8AFB720664C}" type="datetimeFigureOut">
               <a:rPr lang="en-US" smtClean="0"/>
-              <a:t>5/24/2026</a:t>
+              <a:t>5/27/2026</a:t>
             </a:fld>
             <a:endParaRPr lang="en-US"/>
           </a:p>
@@ -1234,7 +1238,7 @@
           <a:p>
             <a:fld id="{6383FAE1-13DE-4511-8C1B-C8AFB720664C}" type="datetimeFigureOut">
               <a:rPr lang="en-US" smtClean="0"/>
-              <a:t>5/24/2026</a:t>
+              <a:t>5/27/2026</a:t>
             </a:fld>
             <a:endParaRPr lang="en-US"/>
           </a:p>
@@ -1432,7 +1436,7 @@
           <a:p>
             <a:fld id="{6383FAE1-13DE-4511-8C1B-C8AFB720664C}" type="datetimeFigureOut">
               <a:rPr lang="en-US" smtClean="0"/>
-              <a:t>5/24/2026</a:t>
+              <a:t>5/27/2026</a:t>
             </a:fld>
             <a:endParaRPr lang="en-US"/>
           </a:p>
@@ -1707,7 +1711,7 @@
           <a:p>
             <a:fld id="{6383FAE1-13DE-4511-8C1B-C8AFB720664C}" type="datetimeFigureOut">
               <a:rPr lang="en-US" smtClean="0"/>
-              <a:t>5/24/2026</a:t>
+              <a:t>5/27/2026</a:t>
             </a:fld>
             <a:endParaRPr lang="en-US"/>
           </a:p>
@@ -1972,7 +1976,7 @@
           <a:p>
             <a:fld id="{6383FAE1-13DE-4511-8C1B-C8AFB720664C}" type="datetimeFigureOut">
               <a:rPr lang="en-US" smtClean="0"/>
-              <a:t>5/24/2026</a:t>
+              <a:t>5/27/2026</a:t>
             </a:fld>
             <a:endParaRPr lang="en-US"/>
           </a:p>
@@ -2384,7 +2388,7 @@
           <a:p>
             <a:fld id="{6383FAE1-13DE-4511-8C1B-C8AFB720664C}" type="datetimeFigureOut">
               <a:rPr lang="en-US" smtClean="0"/>
-              <a:t>5/24/2026</a:t>
+              <a:t>5/27/2026</a:t>
             </a:fld>
             <a:endParaRPr lang="en-US"/>
           </a:p>
@@ -2525,7 +2529,7 @@
           <a:p>
             <a:fld id="{6383FAE1-13DE-4511-8C1B-C8AFB720664C}" type="datetimeFigureOut">
               <a:rPr lang="en-US" smtClean="0"/>
-              <a:t>5/24/2026</a:t>
+              <a:t>5/27/2026</a:t>
             </a:fld>
             <a:endParaRPr lang="en-US"/>
           </a:p>
@@ -2638,7 +2642,7 @@
           <a:p>
             <a:fld id="{6383FAE1-13DE-4511-8C1B-C8AFB720664C}" type="datetimeFigureOut">
               <a:rPr lang="en-US" smtClean="0"/>
-              <a:t>5/24/2026</a:t>
+              <a:t>5/27/2026</a:t>
             </a:fld>
             <a:endParaRPr lang="en-US"/>
           </a:p>
@@ -2949,7 +2953,7 @@
           <a:p>
             <a:fld id="{6383FAE1-13DE-4511-8C1B-C8AFB720664C}" type="datetimeFigureOut">
               <a:rPr lang="en-US" smtClean="0"/>
-              <a:t>5/24/2026</a:t>
+              <a:t>5/27/2026</a:t>
             </a:fld>
             <a:endParaRPr lang="en-US"/>
           </a:p>
@@ -3240,7 +3244,7 @@
           <a:p>
             <a:fld id="{6383FAE1-13DE-4511-8C1B-C8AFB720664C}" type="datetimeFigureOut">
               <a:rPr lang="en-US" smtClean="0"/>
-              <a:t>5/24/2026</a:t>
+              <a:t>5/27/2026</a:t>
             </a:fld>
             <a:endParaRPr lang="en-US"/>
           </a:p>
@@ -3484,7 +3488,7 @@
           <a:p>
             <a:fld id="{6383FAE1-13DE-4511-8C1B-C8AFB720664C}" type="datetimeFigureOut">
               <a:rPr lang="en-US" smtClean="0"/>
-              <a:t>5/24/2026</a:t>
+              <a:t>5/27/2026</a:t>
             </a:fld>
             <a:endParaRPr lang="en-US"/>
           </a:p>
@@ -4043,6 +4047,48 @@
           <a:chExt cx="0" cy="0"/>
         </a:xfrm>
       </p:grpSpPr>
+      <p:sp>
+        <p:nvSpPr>
+          <p:cNvPr id="2" name="TextBox 1">
+            <a:extLst>
+              <a:ext uri="{FF2B5EF4-FFF2-40B4-BE49-F238E27FC236}">
+                <a16:creationId xmlns:a16="http://schemas.microsoft.com/office/drawing/2014/main" id="{9400866D-0F86-98FC-6CDE-727EB479D6CA}"/>
+              </a:ext>
+            </a:extLst>
+          </p:cNvPr>
+          <p:cNvSpPr txBox="1"/>
+          <p:nvPr/>
+        </p:nvSpPr>
+        <p:spPr>
+          <a:xfrm>
+            <a:off x="1709928" y="2615184"/>
+            <a:ext cx="9636934" cy="707886"/>
+          </a:xfrm>
+          <a:prstGeom prst="rect">
+            <a:avLst/>
+          </a:prstGeom>
+          <a:noFill/>
+        </p:spPr>
+        <p:txBody>
+          <a:bodyPr wrap="none" rtlCol="0">
+            <a:spAutoFit/>
+          </a:bodyPr>
+          <a:lstStyle/>
+          <a:p>
+            <a:r>
+              <a:rPr lang="en-US" sz="4000" dirty="0">
+                <a:solidFill>
+                  <a:schemeClr val="accent6">
+                    <a:lumMod val="60000"/>
+                    <a:lumOff val="40000"/>
+                  </a:schemeClr>
+                </a:solidFill>
+              </a:rPr>
+              <a:t>How do big financial companies collect data ?</a:t>
+            </a:r>
+          </a:p>
+        </p:txBody>
+      </p:sp>
     </p:spTree>
     <p:extLst>
       <p:ext uri="{BB962C8B-B14F-4D97-AF65-F5344CB8AC3E}">
@@ -4057,6 +4103,1016 @@
 </file>
 
 <file path=ppt/slides/slide10.xml><?xml version="1.0" encoding="utf-8"?>
+<p:sld xmlns:a="http://schemas.openxmlformats.org/drawingml/2006/main" xmlns:r="http://schemas.openxmlformats.org/officeDocument/2006/relationships" xmlns:p="http://schemas.openxmlformats.org/presentationml/2006/main">
+  <p:cSld>
+    <p:spTree>
+      <p:nvGrpSpPr>
+        <p:cNvPr id="1" name="">
+          <a:extLst>
+            <a:ext uri="{FF2B5EF4-FFF2-40B4-BE49-F238E27FC236}">
+              <a16:creationId xmlns:a16="http://schemas.microsoft.com/office/drawing/2014/main" id="{040CB460-3D8F-D080-AE9E-9B01877AAE73}"/>
+            </a:ext>
+          </a:extLst>
+        </p:cNvPr>
+        <p:cNvGrpSpPr/>
+        <p:nvPr/>
+      </p:nvGrpSpPr>
+      <p:grpSpPr>
+        <a:xfrm>
+          <a:off x="0" y="0"/>
+          <a:ext cx="0" cy="0"/>
+          <a:chOff x="0" y="0"/>
+          <a:chExt cx="0" cy="0"/>
+        </a:xfrm>
+      </p:grpSpPr>
+      <p:sp>
+        <p:nvSpPr>
+          <p:cNvPr id="5" name="TextBox 4">
+            <a:extLst>
+              <a:ext uri="{FF2B5EF4-FFF2-40B4-BE49-F238E27FC236}">
+                <a16:creationId xmlns:a16="http://schemas.microsoft.com/office/drawing/2014/main" id="{AEDBF22F-5B71-C490-0153-E3AB1D7442AB}"/>
+              </a:ext>
+            </a:extLst>
+          </p:cNvPr>
+          <p:cNvSpPr txBox="1"/>
+          <p:nvPr/>
+        </p:nvSpPr>
+        <p:spPr>
+          <a:xfrm>
+            <a:off x="274320" y="436894"/>
+            <a:ext cx="8622792" cy="4154984"/>
+          </a:xfrm>
+          <a:prstGeom prst="rect">
+            <a:avLst/>
+          </a:prstGeom>
+          <a:noFill/>
+        </p:spPr>
+        <p:txBody>
+          <a:bodyPr wrap="square">
+            <a:spAutoFit/>
+          </a:bodyPr>
+          <a:lstStyle/>
+          <a:p>
+            <a:r>
+              <a:rPr lang="en-US" sz="2400" b="1" dirty="0">
+                <a:solidFill>
+                  <a:schemeClr val="accent6">
+                    <a:lumMod val="60000"/>
+                    <a:lumOff val="40000"/>
+                  </a:schemeClr>
+                </a:solidFill>
+              </a:rPr>
+              <a:t>Every Payment Tells a Story</a:t>
+            </a:r>
+          </a:p>
+          <a:p>
+            <a:endParaRPr lang="en-US" sz="2400" dirty="0">
+              <a:solidFill>
+                <a:schemeClr val="accent6">
+                  <a:lumMod val="60000"/>
+                  <a:lumOff val="40000"/>
+                </a:schemeClr>
+              </a:solidFill>
+            </a:endParaRPr>
+          </a:p>
+          <a:p>
+            <a:r>
+              <a:rPr lang="en-US" sz="2400" dirty="0">
+                <a:solidFill>
+                  <a:schemeClr val="accent6">
+                    <a:lumMod val="60000"/>
+                    <a:lumOff val="40000"/>
+                  </a:schemeClr>
+                </a:solidFill>
+              </a:rPr>
+              <a:t>A transaction is not just money moving. It's a data point with 20+ attributes attached.</a:t>
+            </a:r>
+          </a:p>
+          <a:p>
+            <a:endParaRPr lang="en-US" sz="2400" dirty="0">
+              <a:solidFill>
+                <a:schemeClr val="accent6">
+                  <a:lumMod val="60000"/>
+                  <a:lumOff val="40000"/>
+                </a:schemeClr>
+              </a:solidFill>
+            </a:endParaRPr>
+          </a:p>
+          <a:p>
+            <a:r>
+              <a:rPr lang="en-US" sz="2400" dirty="0">
+                <a:solidFill>
+                  <a:schemeClr val="accent6">
+                    <a:lumMod val="60000"/>
+                    <a:lumOff val="40000"/>
+                  </a:schemeClr>
+                </a:solidFill>
+              </a:rPr>
+              <a:t>Every payment logs:</a:t>
+            </a:r>
+          </a:p>
+          <a:p>
+            <a:pPr marL="342900" indent="-342900">
+              <a:buFont typeface="Arial" panose="020B0604020202020204" pitchFamily="34" charset="0"/>
+              <a:buChar char="•"/>
+            </a:pPr>
+            <a:r>
+              <a:rPr lang="en-US" sz="2400" dirty="0">
+                <a:solidFill>
+                  <a:schemeClr val="accent6">
+                    <a:lumMod val="60000"/>
+                    <a:lumOff val="40000"/>
+                  </a:schemeClr>
+                </a:solidFill>
+              </a:rPr>
+              <a:t>Amount, currency, time, date</a:t>
+            </a:r>
+          </a:p>
+          <a:p>
+            <a:pPr marL="342900" indent="-342900">
+              <a:buFont typeface="Arial" panose="020B0604020202020204" pitchFamily="34" charset="0"/>
+              <a:buChar char="•"/>
+            </a:pPr>
+            <a:r>
+              <a:rPr lang="en-US" sz="2400" dirty="0">
+                <a:solidFill>
+                  <a:schemeClr val="accent6">
+                    <a:lumMod val="60000"/>
+                    <a:lumOff val="40000"/>
+                  </a:schemeClr>
+                </a:solidFill>
+              </a:rPr>
+              <a:t>Merchant name and category (food, pharmacy, travel...)</a:t>
+            </a:r>
+          </a:p>
+          <a:p>
+            <a:pPr marL="342900" indent="-342900">
+              <a:buFont typeface="Arial" panose="020B0604020202020204" pitchFamily="34" charset="0"/>
+              <a:buChar char="•"/>
+            </a:pPr>
+            <a:r>
+              <a:rPr lang="en-US" sz="2400" dirty="0">
+                <a:solidFill>
+                  <a:schemeClr val="accent6">
+                    <a:lumMod val="60000"/>
+                    <a:lumOff val="40000"/>
+                  </a:schemeClr>
+                </a:solidFill>
+              </a:rPr>
+              <a:t>Location of the merchant</a:t>
+            </a:r>
+          </a:p>
+          <a:p>
+            <a:pPr marL="342900" indent="-342900">
+              <a:buFont typeface="Arial" panose="020B0604020202020204" pitchFamily="34" charset="0"/>
+              <a:buChar char="•"/>
+            </a:pPr>
+            <a:r>
+              <a:rPr lang="en-US" sz="2400" dirty="0">
+                <a:solidFill>
+                  <a:schemeClr val="accent6">
+                    <a:lumMod val="60000"/>
+                    <a:lumOff val="40000"/>
+                  </a:schemeClr>
+                </a:solidFill>
+              </a:rPr>
+              <a:t>Payment method (card, </a:t>
+            </a:r>
+            <a:r>
+              <a:rPr lang="en-US" sz="2400" dirty="0" err="1">
+                <a:solidFill>
+                  <a:schemeClr val="accent6">
+                    <a:lumMod val="60000"/>
+                    <a:lumOff val="40000"/>
+                  </a:schemeClr>
+                </a:solidFill>
+              </a:rPr>
+              <a:t>CliQ</a:t>
+            </a:r>
+            <a:r>
+              <a:rPr lang="en-US" sz="2400" dirty="0">
+                <a:solidFill>
+                  <a:schemeClr val="accent6">
+                    <a:lumMod val="60000"/>
+                    <a:lumOff val="40000"/>
+                  </a:schemeClr>
+                </a:solidFill>
+              </a:rPr>
+              <a:t>, cash deposit)</a:t>
+            </a:r>
+          </a:p>
+          <a:p>
+            <a:pPr marL="342900" indent="-342900">
+              <a:buFont typeface="Arial" panose="020B0604020202020204" pitchFamily="34" charset="0"/>
+              <a:buChar char="•"/>
+            </a:pPr>
+            <a:r>
+              <a:rPr lang="en-US" sz="2400" dirty="0">
+                <a:solidFill>
+                  <a:schemeClr val="accent6">
+                    <a:lumMod val="60000"/>
+                    <a:lumOff val="40000"/>
+                  </a:schemeClr>
+                </a:solidFill>
+              </a:rPr>
+              <a:t>Device used to authorize it</a:t>
+            </a:r>
+          </a:p>
+        </p:txBody>
+      </p:sp>
+      <p:pic>
+        <p:nvPicPr>
+          <p:cNvPr id="4" name="Picture 3">
+            <a:extLst>
+              <a:ext uri="{FF2B5EF4-FFF2-40B4-BE49-F238E27FC236}">
+                <a16:creationId xmlns:a16="http://schemas.microsoft.com/office/drawing/2014/main" id="{36156A38-858A-4794-2E6A-E4B38F782EF7}"/>
+              </a:ext>
+            </a:extLst>
+          </p:cNvPr>
+          <p:cNvPicPr>
+            <a:picLocks noChangeAspect="1"/>
+          </p:cNvPicPr>
+          <p:nvPr/>
+        </p:nvPicPr>
+        <p:blipFill>
+          <a:blip r:embed="rId2"/>
+          <a:stretch>
+            <a:fillRect/>
+          </a:stretch>
+        </p:blipFill>
+        <p:spPr>
+          <a:xfrm>
+            <a:off x="8658316" y="4222546"/>
+            <a:ext cx="3311180" cy="2396795"/>
+          </a:xfrm>
+          <a:prstGeom prst="rect">
+            <a:avLst/>
+          </a:prstGeom>
+        </p:spPr>
+      </p:pic>
+    </p:spTree>
+    <p:extLst>
+      <p:ext uri="{BB962C8B-B14F-4D97-AF65-F5344CB8AC3E}">
+        <p14:creationId xmlns:p14="http://schemas.microsoft.com/office/powerpoint/2010/main" val="2718047956"/>
+      </p:ext>
+    </p:extLst>
+  </p:cSld>
+  <p:clrMapOvr>
+    <a:masterClrMapping/>
+  </p:clrMapOvr>
+</p:sld>
+</file>
+
+<file path=ppt/slides/slide11.xml><?xml version="1.0" encoding="utf-8"?>
+<p:sld xmlns:a="http://schemas.openxmlformats.org/drawingml/2006/main" xmlns:r="http://schemas.openxmlformats.org/officeDocument/2006/relationships" xmlns:p="http://schemas.openxmlformats.org/presentationml/2006/main">
+  <p:cSld>
+    <p:spTree>
+      <p:nvGrpSpPr>
+        <p:cNvPr id="1" name="">
+          <a:extLst>
+            <a:ext uri="{FF2B5EF4-FFF2-40B4-BE49-F238E27FC236}">
+              <a16:creationId xmlns:a16="http://schemas.microsoft.com/office/drawing/2014/main" id="{9F610B79-1529-CECE-89B0-B5F4ADA71D92}"/>
+            </a:ext>
+          </a:extLst>
+        </p:cNvPr>
+        <p:cNvGrpSpPr/>
+        <p:nvPr/>
+      </p:nvGrpSpPr>
+      <p:grpSpPr>
+        <a:xfrm>
+          <a:off x="0" y="0"/>
+          <a:ext cx="0" cy="0"/>
+          <a:chOff x="0" y="0"/>
+          <a:chExt cx="0" cy="0"/>
+        </a:xfrm>
+      </p:grpSpPr>
+      <p:pic>
+        <p:nvPicPr>
+          <p:cNvPr id="4" name="Picture 3">
+            <a:extLst>
+              <a:ext uri="{FF2B5EF4-FFF2-40B4-BE49-F238E27FC236}">
+                <a16:creationId xmlns:a16="http://schemas.microsoft.com/office/drawing/2014/main" id="{C9890EF7-4E19-FCED-97CD-F397E4D9CA8F}"/>
+              </a:ext>
+            </a:extLst>
+          </p:cNvPr>
+          <p:cNvPicPr>
+            <a:picLocks noChangeAspect="1"/>
+          </p:cNvPicPr>
+          <p:nvPr/>
+        </p:nvPicPr>
+        <p:blipFill>
+          <a:blip r:embed="rId2"/>
+          <a:stretch>
+            <a:fillRect/>
+          </a:stretch>
+        </p:blipFill>
+        <p:spPr>
+          <a:xfrm>
+            <a:off x="8658316" y="4222546"/>
+            <a:ext cx="3311180" cy="2396795"/>
+          </a:xfrm>
+          <a:prstGeom prst="rect">
+            <a:avLst/>
+          </a:prstGeom>
+        </p:spPr>
+      </p:pic>
+      <p:sp>
+        <p:nvSpPr>
+          <p:cNvPr id="5" name="TextBox 4">
+            <a:extLst>
+              <a:ext uri="{FF2B5EF4-FFF2-40B4-BE49-F238E27FC236}">
+                <a16:creationId xmlns:a16="http://schemas.microsoft.com/office/drawing/2014/main" id="{912D52A0-0DD7-3B2B-76DE-2C8946E28048}"/>
+              </a:ext>
+            </a:extLst>
+          </p:cNvPr>
+          <p:cNvSpPr txBox="1"/>
+          <p:nvPr/>
+        </p:nvSpPr>
+        <p:spPr>
+          <a:xfrm>
+            <a:off x="274320" y="436894"/>
+            <a:ext cx="8622792" cy="4893647"/>
+          </a:xfrm>
+          <a:prstGeom prst="rect">
+            <a:avLst/>
+          </a:prstGeom>
+          <a:noFill/>
+        </p:spPr>
+        <p:txBody>
+          <a:bodyPr wrap="square">
+            <a:spAutoFit/>
+          </a:bodyPr>
+          <a:lstStyle/>
+          <a:p>
+            <a:r>
+              <a:rPr lang="en-US" sz="2400" b="1" dirty="0">
+                <a:solidFill>
+                  <a:schemeClr val="accent6">
+                    <a:lumMod val="60000"/>
+                    <a:lumOff val="40000"/>
+                  </a:schemeClr>
+                </a:solidFill>
+              </a:rPr>
+              <a:t>Your Spending = Your Life</a:t>
+            </a:r>
+          </a:p>
+          <a:p>
+            <a:endParaRPr lang="en-US" sz="2400" dirty="0">
+              <a:solidFill>
+                <a:schemeClr val="accent6">
+                  <a:lumMod val="60000"/>
+                  <a:lumOff val="40000"/>
+                </a:schemeClr>
+              </a:solidFill>
+            </a:endParaRPr>
+          </a:p>
+          <a:p>
+            <a:r>
+              <a:rPr lang="en-US" sz="2400" dirty="0">
+                <a:solidFill>
+                  <a:schemeClr val="accent6">
+                    <a:lumMod val="60000"/>
+                    <a:lumOff val="40000"/>
+                  </a:schemeClr>
+                </a:solidFill>
+              </a:rPr>
+              <a:t>Over months, transactions reveal things you never consciously shared.</a:t>
+            </a:r>
+          </a:p>
+          <a:p>
+            <a:endParaRPr lang="en-US" sz="2400" dirty="0">
+              <a:solidFill>
+                <a:schemeClr val="accent6">
+                  <a:lumMod val="60000"/>
+                  <a:lumOff val="40000"/>
+                </a:schemeClr>
+              </a:solidFill>
+            </a:endParaRPr>
+          </a:p>
+          <a:p>
+            <a:pPr marL="342900" indent="-342900">
+              <a:buFont typeface="Arial" panose="020B0604020202020204" pitchFamily="34" charset="0"/>
+              <a:buChar char="•"/>
+            </a:pPr>
+            <a:r>
+              <a:rPr lang="en-US" sz="2400" dirty="0">
+                <a:solidFill>
+                  <a:schemeClr val="accent6">
+                    <a:lumMod val="60000"/>
+                    <a:lumOff val="40000"/>
+                  </a:schemeClr>
+                </a:solidFill>
+              </a:rPr>
+              <a:t>Regular pharmacy spend → possible chronic illness</a:t>
+            </a:r>
+          </a:p>
+          <a:p>
+            <a:pPr marL="342900" indent="-342900">
+              <a:buFont typeface="Arial" panose="020B0604020202020204" pitchFamily="34" charset="0"/>
+              <a:buChar char="•"/>
+            </a:pPr>
+            <a:r>
+              <a:rPr lang="en-US" sz="2400" dirty="0">
+                <a:solidFill>
+                  <a:schemeClr val="accent6">
+                    <a:lumMod val="60000"/>
+                    <a:lumOff val="40000"/>
+                  </a:schemeClr>
+                </a:solidFill>
+              </a:rPr>
+              <a:t>Wedding vendors in a short window → getting married</a:t>
+            </a:r>
+          </a:p>
+          <a:p>
+            <a:pPr marL="342900" indent="-342900">
+              <a:buFont typeface="Arial" panose="020B0604020202020204" pitchFamily="34" charset="0"/>
+              <a:buChar char="•"/>
+            </a:pPr>
+            <a:r>
+              <a:rPr lang="en-US" sz="2400" dirty="0">
+                <a:solidFill>
+                  <a:schemeClr val="accent6">
+                    <a:lumMod val="60000"/>
+                    <a:lumOff val="40000"/>
+                  </a:schemeClr>
+                </a:solidFill>
+              </a:rPr>
+              <a:t>Sudden drop in spending → job loss or financial stress</a:t>
+            </a:r>
+          </a:p>
+          <a:p>
+            <a:pPr marL="342900" indent="-342900">
+              <a:buFont typeface="Arial" panose="020B0604020202020204" pitchFamily="34" charset="0"/>
+              <a:buChar char="•"/>
+            </a:pPr>
+            <a:r>
+              <a:rPr lang="en-US" sz="2400" dirty="0">
+                <a:solidFill>
+                  <a:schemeClr val="accent6">
+                    <a:lumMod val="60000"/>
+                    <a:lumOff val="40000"/>
+                  </a:schemeClr>
+                </a:solidFill>
+              </a:rPr>
+              <a:t>Zakat payment in Ramadan → religious observance</a:t>
+            </a:r>
+          </a:p>
+          <a:p>
+            <a:pPr marL="342900" indent="-342900">
+              <a:buFont typeface="Arial" panose="020B0604020202020204" pitchFamily="34" charset="0"/>
+              <a:buChar char="•"/>
+            </a:pPr>
+            <a:endParaRPr lang="en-US" sz="2400" dirty="0">
+              <a:solidFill>
+                <a:schemeClr val="accent6">
+                  <a:lumMod val="60000"/>
+                  <a:lumOff val="40000"/>
+                </a:schemeClr>
+              </a:solidFill>
+            </a:endParaRPr>
+          </a:p>
+          <a:p>
+            <a:r>
+              <a:rPr lang="en-US" sz="2400" b="1" dirty="0">
+                <a:solidFill>
+                  <a:schemeClr val="accent6">
+                    <a:lumMod val="60000"/>
+                    <a:lumOff val="40000"/>
+                  </a:schemeClr>
+                </a:solidFill>
+              </a:rPr>
+              <a:t>Example:</a:t>
+            </a:r>
+            <a:r>
+              <a:rPr lang="en-US" sz="2400" dirty="0">
+                <a:solidFill>
+                  <a:schemeClr val="accent6">
+                    <a:lumMod val="60000"/>
+                    <a:lumOff val="40000"/>
+                  </a:schemeClr>
+                </a:solidFill>
+              </a:rPr>
+              <a:t> </a:t>
+            </a:r>
+            <a:r>
+              <a:rPr lang="en-US" sz="2400" dirty="0" err="1">
+                <a:solidFill>
+                  <a:schemeClr val="accent6">
+                    <a:lumMod val="60000"/>
+                    <a:lumOff val="40000"/>
+                  </a:schemeClr>
+                </a:solidFill>
+              </a:rPr>
+              <a:t>eFawateercom</a:t>
+            </a:r>
+            <a:r>
+              <a:rPr lang="en-US" sz="2400" dirty="0">
+                <a:solidFill>
+                  <a:schemeClr val="accent6">
+                    <a:lumMod val="60000"/>
+                    <a:lumOff val="40000"/>
+                  </a:schemeClr>
+                </a:solidFill>
+              </a:rPr>
+              <a:t> processes electricity, water, and telecom bills for 3M+ Jordanians. Late or missed payments are a direct signal of financial stress — banks can see this.</a:t>
+            </a:r>
+          </a:p>
+        </p:txBody>
+      </p:sp>
+    </p:spTree>
+    <p:extLst>
+      <p:ext uri="{BB962C8B-B14F-4D97-AF65-F5344CB8AC3E}">
+        <p14:creationId xmlns:p14="http://schemas.microsoft.com/office/powerpoint/2010/main" val="3185558444"/>
+      </p:ext>
+    </p:extLst>
+  </p:cSld>
+  <p:clrMapOvr>
+    <a:masterClrMapping/>
+  </p:clrMapOvr>
+</p:sld>
+</file>
+
+<file path=ppt/slides/slide12.xml><?xml version="1.0" encoding="utf-8"?>
+<p:sld xmlns:a="http://schemas.openxmlformats.org/drawingml/2006/main" xmlns:r="http://schemas.openxmlformats.org/officeDocument/2006/relationships" xmlns:p="http://schemas.openxmlformats.org/presentationml/2006/main">
+  <p:cSld>
+    <p:spTree>
+      <p:nvGrpSpPr>
+        <p:cNvPr id="1" name="">
+          <a:extLst>
+            <a:ext uri="{FF2B5EF4-FFF2-40B4-BE49-F238E27FC236}">
+              <a16:creationId xmlns:a16="http://schemas.microsoft.com/office/drawing/2014/main" id="{615F655C-DA67-91E7-26B0-F1A685AF599F}"/>
+            </a:ext>
+          </a:extLst>
+        </p:cNvPr>
+        <p:cNvGrpSpPr/>
+        <p:nvPr/>
+      </p:nvGrpSpPr>
+      <p:grpSpPr>
+        <a:xfrm>
+          <a:off x="0" y="0"/>
+          <a:ext cx="0" cy="0"/>
+          <a:chOff x="0" y="0"/>
+          <a:chExt cx="0" cy="0"/>
+        </a:xfrm>
+      </p:grpSpPr>
+      <p:pic>
+        <p:nvPicPr>
+          <p:cNvPr id="4" name="Picture 3">
+            <a:extLst>
+              <a:ext uri="{FF2B5EF4-FFF2-40B4-BE49-F238E27FC236}">
+                <a16:creationId xmlns:a16="http://schemas.microsoft.com/office/drawing/2014/main" id="{3E6CA3F7-B90C-05E9-23CB-58A0F3683F62}"/>
+              </a:ext>
+            </a:extLst>
+          </p:cNvPr>
+          <p:cNvPicPr>
+            <a:picLocks noChangeAspect="1"/>
+          </p:cNvPicPr>
+          <p:nvPr/>
+        </p:nvPicPr>
+        <p:blipFill>
+          <a:blip r:embed="rId2"/>
+          <a:stretch>
+            <a:fillRect/>
+          </a:stretch>
+        </p:blipFill>
+        <p:spPr>
+          <a:xfrm>
+            <a:off x="8658316" y="4222546"/>
+            <a:ext cx="3311180" cy="2396795"/>
+          </a:xfrm>
+          <a:prstGeom prst="rect">
+            <a:avLst/>
+          </a:prstGeom>
+        </p:spPr>
+      </p:pic>
+      <p:sp>
+        <p:nvSpPr>
+          <p:cNvPr id="5" name="TextBox 4">
+            <a:extLst>
+              <a:ext uri="{FF2B5EF4-FFF2-40B4-BE49-F238E27FC236}">
+                <a16:creationId xmlns:a16="http://schemas.microsoft.com/office/drawing/2014/main" id="{09D54911-713B-23FC-2BEB-9F9906A6C575}"/>
+              </a:ext>
+            </a:extLst>
+          </p:cNvPr>
+          <p:cNvSpPr txBox="1"/>
+          <p:nvPr/>
+        </p:nvSpPr>
+        <p:spPr>
+          <a:xfrm>
+            <a:off x="274320" y="436894"/>
+            <a:ext cx="8622792" cy="6001643"/>
+          </a:xfrm>
+          <a:prstGeom prst="rect">
+            <a:avLst/>
+          </a:prstGeom>
+          <a:noFill/>
+        </p:spPr>
+        <p:txBody>
+          <a:bodyPr wrap="square">
+            <a:spAutoFit/>
+          </a:bodyPr>
+          <a:lstStyle/>
+          <a:p>
+            <a:r>
+              <a:rPr lang="en-US" sz="2400" b="1" dirty="0">
+                <a:solidFill>
+                  <a:schemeClr val="accent6">
+                    <a:lumMod val="60000"/>
+                    <a:lumOff val="40000"/>
+                  </a:schemeClr>
+                </a:solidFill>
+              </a:rPr>
+              <a:t>The Pattern Is Worth More Than the Transaction</a:t>
+            </a:r>
+          </a:p>
+          <a:p>
+            <a:endParaRPr lang="en-US" sz="2400" dirty="0">
+              <a:solidFill>
+                <a:schemeClr val="accent6">
+                  <a:lumMod val="60000"/>
+                  <a:lumOff val="40000"/>
+                </a:schemeClr>
+              </a:solidFill>
+            </a:endParaRPr>
+          </a:p>
+          <a:p>
+            <a:r>
+              <a:rPr lang="en-US" sz="2400" dirty="0">
+                <a:solidFill>
+                  <a:schemeClr val="accent6">
+                    <a:lumMod val="60000"/>
+                    <a:lumOff val="40000"/>
+                  </a:schemeClr>
+                </a:solidFill>
+              </a:rPr>
+              <a:t>One purchase means little. One thousand purchases reveal everything.</a:t>
+            </a:r>
+          </a:p>
+          <a:p>
+            <a:endParaRPr lang="en-US" sz="2400" dirty="0">
+              <a:solidFill>
+                <a:schemeClr val="accent6">
+                  <a:lumMod val="60000"/>
+                  <a:lumOff val="40000"/>
+                </a:schemeClr>
+              </a:solidFill>
+            </a:endParaRPr>
+          </a:p>
+          <a:p>
+            <a:pPr marL="342900" indent="-342900">
+              <a:buFont typeface="Arial" panose="020B0604020202020204" pitchFamily="34" charset="0"/>
+              <a:buChar char="•"/>
+            </a:pPr>
+            <a:r>
+              <a:rPr lang="en-US" sz="2400" dirty="0">
+                <a:solidFill>
+                  <a:schemeClr val="accent6">
+                    <a:lumMod val="60000"/>
+                    <a:lumOff val="40000"/>
+                  </a:schemeClr>
+                </a:solidFill>
+              </a:rPr>
+              <a:t>Where you shop (malls vs local markets in your neighborhood)</a:t>
+            </a:r>
+          </a:p>
+          <a:p>
+            <a:pPr marL="342900" indent="-342900">
+              <a:buFont typeface="Arial" panose="020B0604020202020204" pitchFamily="34" charset="0"/>
+              <a:buChar char="•"/>
+            </a:pPr>
+            <a:r>
+              <a:rPr lang="en-US" sz="2400" dirty="0">
+                <a:solidFill>
+                  <a:schemeClr val="accent6">
+                    <a:lumMod val="60000"/>
+                    <a:lumOff val="40000"/>
+                  </a:schemeClr>
+                </a:solidFill>
+              </a:rPr>
+              <a:t>How you manage money (pay bills early vs always late)</a:t>
+            </a:r>
+          </a:p>
+          <a:p>
+            <a:pPr marL="342900" indent="-342900">
+              <a:buFont typeface="Arial" panose="020B0604020202020204" pitchFamily="34" charset="0"/>
+              <a:buChar char="•"/>
+            </a:pPr>
+            <a:r>
+              <a:rPr lang="en-US" sz="2400" dirty="0">
+                <a:solidFill>
+                  <a:schemeClr val="accent6">
+                    <a:lumMod val="60000"/>
+                    <a:lumOff val="40000"/>
+                  </a:schemeClr>
+                </a:solidFill>
+              </a:rPr>
+              <a:t>What life stage you're in (baby products, school supplies, retirement funds</a:t>
+            </a:r>
+          </a:p>
+          <a:p>
+            <a:endParaRPr lang="en-US" sz="2400" b="1" dirty="0">
+              <a:solidFill>
+                <a:schemeClr val="accent6">
+                  <a:lumMod val="60000"/>
+                  <a:lumOff val="40000"/>
+                </a:schemeClr>
+              </a:solidFill>
+            </a:endParaRPr>
+          </a:p>
+          <a:p>
+            <a:r>
+              <a:rPr lang="en-US" sz="2400" b="1" dirty="0">
+                <a:solidFill>
+                  <a:schemeClr val="accent6">
+                    <a:lumMod val="60000"/>
+                    <a:lumOff val="40000"/>
+                  </a:schemeClr>
+                </a:solidFill>
+              </a:rPr>
+              <a:t>Example:</a:t>
+            </a:r>
+            <a:r>
+              <a:rPr lang="en-US" sz="2400" dirty="0">
+                <a:solidFill>
+                  <a:schemeClr val="accent6">
+                    <a:lumMod val="60000"/>
+                    <a:lumOff val="40000"/>
+                  </a:schemeClr>
+                </a:solidFill>
+              </a:rPr>
+              <a:t> Cairo Amman Bank can tell from transaction data alone whether a customer is likely </a:t>
+            </a:r>
+          </a:p>
+          <a:p>
+            <a:pPr marL="342900" indent="-342900">
+              <a:buFont typeface="Arial" panose="020B0604020202020204" pitchFamily="34" charset="0"/>
+              <a:buChar char="•"/>
+            </a:pPr>
+            <a:r>
+              <a:rPr lang="en-US" sz="2400" dirty="0">
+                <a:solidFill>
+                  <a:schemeClr val="accent6">
+                    <a:lumMod val="60000"/>
+                    <a:lumOff val="40000"/>
+                  </a:schemeClr>
+                </a:solidFill>
+              </a:rPr>
+              <a:t>saving for a house, </a:t>
+            </a:r>
+          </a:p>
+          <a:p>
+            <a:pPr marL="342900" indent="-342900">
+              <a:buFont typeface="Arial" panose="020B0604020202020204" pitchFamily="34" charset="0"/>
+              <a:buChar char="•"/>
+            </a:pPr>
+            <a:r>
+              <a:rPr lang="en-US" sz="2400" dirty="0">
+                <a:solidFill>
+                  <a:schemeClr val="accent6">
+                    <a:lumMod val="60000"/>
+                    <a:lumOff val="40000"/>
+                  </a:schemeClr>
+                </a:solidFill>
+              </a:rPr>
+              <a:t>supporting elderly parents, or </a:t>
+            </a:r>
+          </a:p>
+          <a:p>
+            <a:pPr marL="342900" indent="-342900">
+              <a:buFont typeface="Arial" panose="020B0604020202020204" pitchFamily="34" charset="0"/>
+              <a:buChar char="•"/>
+            </a:pPr>
+            <a:r>
+              <a:rPr lang="en-US" sz="2400" dirty="0">
+                <a:solidFill>
+                  <a:schemeClr val="accent6">
+                    <a:lumMod val="60000"/>
+                    <a:lumOff val="40000"/>
+                  </a:schemeClr>
+                </a:solidFill>
+              </a:rPr>
+              <a:t>sending remittances abroad </a:t>
+            </a:r>
+          </a:p>
+          <a:p>
+            <a:r>
+              <a:rPr lang="en-US" sz="2400" dirty="0">
+                <a:solidFill>
+                  <a:schemeClr val="accent6">
+                    <a:lumMod val="60000"/>
+                    <a:lumOff val="40000"/>
+                  </a:schemeClr>
+                </a:solidFill>
+              </a:rPr>
+              <a:t>— before the customer says a word.</a:t>
+            </a:r>
+          </a:p>
+        </p:txBody>
+      </p:sp>
+    </p:spTree>
+    <p:extLst>
+      <p:ext uri="{BB962C8B-B14F-4D97-AF65-F5344CB8AC3E}">
+        <p14:creationId xmlns:p14="http://schemas.microsoft.com/office/powerpoint/2010/main" val="310511601"/>
+      </p:ext>
+    </p:extLst>
+  </p:cSld>
+  <p:clrMapOvr>
+    <a:masterClrMapping/>
+  </p:clrMapOvr>
+</p:sld>
+</file>
+
+<file path=ppt/slides/slide13.xml><?xml version="1.0" encoding="utf-8"?>
+<p:sld xmlns:a="http://schemas.openxmlformats.org/drawingml/2006/main" xmlns:r="http://schemas.openxmlformats.org/officeDocument/2006/relationships" xmlns:p="http://schemas.openxmlformats.org/presentationml/2006/main">
+  <p:cSld>
+    <p:spTree>
+      <p:nvGrpSpPr>
+        <p:cNvPr id="1" name="">
+          <a:extLst>
+            <a:ext uri="{FF2B5EF4-FFF2-40B4-BE49-F238E27FC236}">
+              <a16:creationId xmlns:a16="http://schemas.microsoft.com/office/drawing/2014/main" id="{922DCB73-C980-75D8-0C3A-612293E2C4D4}"/>
+            </a:ext>
+          </a:extLst>
+        </p:cNvPr>
+        <p:cNvGrpSpPr/>
+        <p:nvPr/>
+      </p:nvGrpSpPr>
+      <p:grpSpPr>
+        <a:xfrm>
+          <a:off x="0" y="0"/>
+          <a:ext cx="0" cy="0"/>
+          <a:chOff x="0" y="0"/>
+          <a:chExt cx="0" cy="0"/>
+        </a:xfrm>
+      </p:grpSpPr>
+      <p:pic>
+        <p:nvPicPr>
+          <p:cNvPr id="4" name="Picture 3">
+            <a:extLst>
+              <a:ext uri="{FF2B5EF4-FFF2-40B4-BE49-F238E27FC236}">
+                <a16:creationId xmlns:a16="http://schemas.microsoft.com/office/drawing/2014/main" id="{65B890CA-32FA-754E-3BEB-75BE524CAD8C}"/>
+              </a:ext>
+            </a:extLst>
+          </p:cNvPr>
+          <p:cNvPicPr>
+            <a:picLocks noChangeAspect="1"/>
+          </p:cNvPicPr>
+          <p:nvPr/>
+        </p:nvPicPr>
+        <p:blipFill>
+          <a:blip r:embed="rId2"/>
+          <a:stretch>
+            <a:fillRect/>
+          </a:stretch>
+        </p:blipFill>
+        <p:spPr>
+          <a:xfrm>
+            <a:off x="8658316" y="4222546"/>
+            <a:ext cx="3311180" cy="2396795"/>
+          </a:xfrm>
+          <a:prstGeom prst="rect">
+            <a:avLst/>
+          </a:prstGeom>
+        </p:spPr>
+      </p:pic>
+      <p:sp>
+        <p:nvSpPr>
+          <p:cNvPr id="5" name="TextBox 4">
+            <a:extLst>
+              <a:ext uri="{FF2B5EF4-FFF2-40B4-BE49-F238E27FC236}">
+                <a16:creationId xmlns:a16="http://schemas.microsoft.com/office/drawing/2014/main" id="{45DCEDDE-B175-EAE5-6F49-B4033BFB7F1C}"/>
+              </a:ext>
+            </a:extLst>
+          </p:cNvPr>
+          <p:cNvSpPr txBox="1"/>
+          <p:nvPr/>
+        </p:nvSpPr>
+        <p:spPr>
+          <a:xfrm>
+            <a:off x="274320" y="436894"/>
+            <a:ext cx="8622792" cy="3785652"/>
+          </a:xfrm>
+          <a:prstGeom prst="rect">
+            <a:avLst/>
+          </a:prstGeom>
+          <a:noFill/>
+        </p:spPr>
+        <p:txBody>
+          <a:bodyPr wrap="square">
+            <a:spAutoFit/>
+          </a:bodyPr>
+          <a:lstStyle/>
+          <a:p>
+            <a:r>
+              <a:rPr lang="en-US" sz="2400" b="1" dirty="0">
+                <a:solidFill>
+                  <a:schemeClr val="accent6">
+                    <a:lumMod val="60000"/>
+                    <a:lumOff val="40000"/>
+                  </a:schemeClr>
+                </a:solidFill>
+              </a:rPr>
+              <a:t>Discussion Question</a:t>
+            </a:r>
+          </a:p>
+          <a:p>
+            <a:endParaRPr lang="en-US" sz="2400" dirty="0">
+              <a:solidFill>
+                <a:schemeClr val="accent6">
+                  <a:lumMod val="60000"/>
+                  <a:lumOff val="40000"/>
+                </a:schemeClr>
+              </a:solidFill>
+            </a:endParaRPr>
+          </a:p>
+          <a:p>
+            <a:r>
+              <a:rPr lang="en-US" sz="2400" dirty="0">
+                <a:solidFill>
+                  <a:schemeClr val="accent6">
+                    <a:lumMod val="60000"/>
+                    <a:lumOff val="40000"/>
+                  </a:schemeClr>
+                </a:solidFill>
+              </a:rPr>
+              <a:t>A young man in Amman has a stable salary but his transaction history shows he spends heavily at restaurants and never saves.</a:t>
+            </a:r>
+          </a:p>
+          <a:p>
+            <a:endParaRPr lang="en-US" sz="2400" dirty="0">
+              <a:solidFill>
+                <a:schemeClr val="accent6">
+                  <a:lumMod val="60000"/>
+                  <a:lumOff val="40000"/>
+                </a:schemeClr>
+              </a:solidFill>
+            </a:endParaRPr>
+          </a:p>
+          <a:p>
+            <a:r>
+              <a:rPr lang="en-US" sz="2400" dirty="0">
+                <a:solidFill>
+                  <a:schemeClr val="accent6">
+                    <a:lumMod val="60000"/>
+                    <a:lumOff val="40000"/>
+                  </a:schemeClr>
+                </a:solidFill>
+              </a:rPr>
+              <a:t> A microfinance company uses this to charge him a higher interest rate than his colleague with the same income.</a:t>
+            </a:r>
+          </a:p>
+          <a:p>
+            <a:endParaRPr lang="en-US" sz="2400" dirty="0">
+              <a:solidFill>
+                <a:schemeClr val="accent6">
+                  <a:lumMod val="60000"/>
+                  <a:lumOff val="40000"/>
+                </a:schemeClr>
+              </a:solidFill>
+            </a:endParaRPr>
+          </a:p>
+          <a:p>
+            <a:r>
+              <a:rPr lang="en-US" sz="2400" dirty="0">
+                <a:solidFill>
+                  <a:schemeClr val="accent6">
+                    <a:lumMod val="60000"/>
+                    <a:lumOff val="40000"/>
+                  </a:schemeClr>
+                </a:solidFill>
+              </a:rPr>
+              <a:t>Is that fair? </a:t>
+            </a:r>
+          </a:p>
+          <a:p>
+            <a:r>
+              <a:rPr lang="en-US" sz="2400" dirty="0">
+                <a:solidFill>
+                  <a:schemeClr val="accent6">
+                    <a:lumMod val="60000"/>
+                    <a:lumOff val="40000"/>
+                  </a:schemeClr>
+                </a:solidFill>
+              </a:rPr>
+              <a:t>Where should companies draw the line?</a:t>
+            </a:r>
+          </a:p>
+        </p:txBody>
+      </p:sp>
+    </p:spTree>
+    <p:extLst>
+      <p:ext uri="{BB962C8B-B14F-4D97-AF65-F5344CB8AC3E}">
+        <p14:creationId xmlns:p14="http://schemas.microsoft.com/office/powerpoint/2010/main" val="3649545384"/>
+      </p:ext>
+    </p:extLst>
+  </p:cSld>
+  <p:clrMapOvr>
+    <a:masterClrMapping/>
+  </p:clrMapOvr>
+</p:sld>
+</file>
+
+<file path=ppt/slides/slide14.xml><?xml version="1.0" encoding="utf-8"?>
 <p:sld xmlns:a="http://schemas.openxmlformats.org/drawingml/2006/main" xmlns:r="http://schemas.openxmlformats.org/officeDocument/2006/relationships" xmlns:p="http://schemas.openxmlformats.org/presentationml/2006/main">
   <p:cSld>
     <p:spTree>
@@ -4300,7 +5356,7 @@
 </p:sld>
 </file>
 
-<file path=ppt/slides/slide11.xml><?xml version="1.0" encoding="utf-8"?>
+<file path=ppt/slides/slide15.xml><?xml version="1.0" encoding="utf-8"?>
 <p:sld xmlns:a="http://schemas.openxmlformats.org/drawingml/2006/main" xmlns:r="http://schemas.openxmlformats.org/officeDocument/2006/relationships" xmlns:p="http://schemas.openxmlformats.org/presentationml/2006/main">
   <p:cSld>
     <p:spTree>
@@ -4597,7 +5653,7 @@
 </p:sld>
 </file>
 
-<file path=ppt/slides/slide12.xml><?xml version="1.0" encoding="utf-8"?>
+<file path=ppt/slides/slide16.xml><?xml version="1.0" encoding="utf-8"?>
 <p:sld xmlns:a="http://schemas.openxmlformats.org/drawingml/2006/main" xmlns:r="http://schemas.openxmlformats.org/officeDocument/2006/relationships" xmlns:p="http://schemas.openxmlformats.org/presentationml/2006/main">
   <p:cSld>
     <p:spTree>
@@ -4787,7 +5843,7 @@
 </p:sld>
 </file>
 
-<file path=ppt/slides/slide13.xml><?xml version="1.0" encoding="utf-8"?>
+<file path=ppt/slides/slide17.xml><?xml version="1.0" encoding="utf-8"?>
 <p:sld xmlns:a="http://schemas.openxmlformats.org/drawingml/2006/main" xmlns:r="http://schemas.openxmlformats.org/officeDocument/2006/relationships" xmlns:p="http://schemas.openxmlformats.org/presentationml/2006/main">
   <p:cSld>
     <p:spTree>
@@ -5071,7 +6127,7 @@
 </p:sld>
 </file>
 
-<file path=ppt/slides/slide14.xml><?xml version="1.0" encoding="utf-8"?>
+<file path=ppt/slides/slide18.xml><?xml version="1.0" encoding="utf-8"?>
 <p:sld xmlns:a="http://schemas.openxmlformats.org/drawingml/2006/main" xmlns:r="http://schemas.openxmlformats.org/officeDocument/2006/relationships" xmlns:p="http://schemas.openxmlformats.org/presentationml/2006/main">
   <p:cSld>
     <p:spTree>
@@ -5352,7 +6408,7 @@
 </p:sld>
 </file>
 
-<file path=ppt/slides/slide15.xml><?xml version="1.0" encoding="utf-8"?>
+<file path=ppt/slides/slide19.xml><?xml version="1.0" encoding="utf-8"?>
 <p:sld xmlns:a="http://schemas.openxmlformats.org/drawingml/2006/main" xmlns:r="http://schemas.openxmlformats.org/officeDocument/2006/relationships" xmlns:p="http://schemas.openxmlformats.org/presentationml/2006/main">
   <p:cSld>
     <p:spTree>
@@ -5641,7 +6697,304 @@
 </p:sld>
 </file>
 
-<file path=ppt/slides/slide16.xml><?xml version="1.0" encoding="utf-8"?>
+<file path=ppt/slides/slide2.xml><?xml version="1.0" encoding="utf-8"?>
+<p:sld xmlns:a="http://schemas.openxmlformats.org/drawingml/2006/main" xmlns:r="http://schemas.openxmlformats.org/officeDocument/2006/relationships" xmlns:p="http://schemas.openxmlformats.org/presentationml/2006/main">
+  <p:cSld>
+    <p:spTree>
+      <p:nvGrpSpPr>
+        <p:cNvPr id="1" name=""/>
+        <p:cNvGrpSpPr/>
+        <p:nvPr/>
+      </p:nvGrpSpPr>
+      <p:grpSpPr>
+        <a:xfrm>
+          <a:off x="0" y="0"/>
+          <a:ext cx="0" cy="0"/>
+          <a:chOff x="0" y="0"/>
+          <a:chExt cx="0" cy="0"/>
+        </a:xfrm>
+      </p:grpSpPr>
+      <p:pic>
+        <p:nvPicPr>
+          <p:cNvPr id="3" name="Picture 2">
+            <a:extLst>
+              <a:ext uri="{FF2B5EF4-FFF2-40B4-BE49-F238E27FC236}">
+                <a16:creationId xmlns:a16="http://schemas.microsoft.com/office/drawing/2014/main" id="{07597750-66B5-9BE5-3B00-CD63A4EB1CB6}"/>
+              </a:ext>
+            </a:extLst>
+          </p:cNvPr>
+          <p:cNvPicPr>
+            <a:picLocks noChangeAspect="1"/>
+          </p:cNvPicPr>
+          <p:nvPr/>
+        </p:nvPicPr>
+        <p:blipFill>
+          <a:blip r:embed="rId2"/>
+          <a:stretch>
+            <a:fillRect/>
+          </a:stretch>
+        </p:blipFill>
+        <p:spPr>
+          <a:xfrm>
+            <a:off x="9235994" y="0"/>
+            <a:ext cx="2956006" cy="2048256"/>
+          </a:xfrm>
+          <a:prstGeom prst="rect">
+            <a:avLst/>
+          </a:prstGeom>
+        </p:spPr>
+      </p:pic>
+      <p:sp>
+        <p:nvSpPr>
+          <p:cNvPr id="5" name="TextBox 4">
+            <a:extLst>
+              <a:ext uri="{FF2B5EF4-FFF2-40B4-BE49-F238E27FC236}">
+                <a16:creationId xmlns:a16="http://schemas.microsoft.com/office/drawing/2014/main" id="{73CECE56-F5BF-2325-7236-4629AED98577}"/>
+              </a:ext>
+            </a:extLst>
+          </p:cNvPr>
+          <p:cNvSpPr txBox="1"/>
+          <p:nvPr/>
+        </p:nvSpPr>
+        <p:spPr>
+          <a:xfrm>
+            <a:off x="310896" y="921526"/>
+            <a:ext cx="8622792" cy="3785652"/>
+          </a:xfrm>
+          <a:prstGeom prst="rect">
+            <a:avLst/>
+          </a:prstGeom>
+          <a:noFill/>
+        </p:spPr>
+        <p:txBody>
+          <a:bodyPr wrap="square">
+            <a:spAutoFit/>
+          </a:bodyPr>
+          <a:lstStyle/>
+          <a:p>
+            <a:pPr>
+              <a:buNone/>
+            </a:pPr>
+            <a:r>
+              <a:rPr lang="en-US" sz="2400" b="1" dirty="0">
+                <a:solidFill>
+                  <a:schemeClr val="accent6">
+                    <a:lumMod val="60000"/>
+                    <a:lumOff val="40000"/>
+                  </a:schemeClr>
+                </a:solidFill>
+              </a:rPr>
+              <a:t>The App That Never Sleeps</a:t>
+            </a:r>
+          </a:p>
+          <a:p>
+            <a:pPr>
+              <a:buNone/>
+            </a:pPr>
+            <a:endParaRPr lang="en-US" sz="2400" dirty="0">
+              <a:solidFill>
+                <a:schemeClr val="accent6">
+                  <a:lumMod val="60000"/>
+                  <a:lumOff val="40000"/>
+                </a:schemeClr>
+              </a:solidFill>
+            </a:endParaRPr>
+          </a:p>
+          <a:p>
+            <a:pPr>
+              <a:buNone/>
+            </a:pPr>
+            <a:r>
+              <a:rPr lang="en-US" sz="2400" dirty="0">
+                <a:solidFill>
+                  <a:schemeClr val="accent6">
+                    <a:lumMod val="60000"/>
+                    <a:lumOff val="40000"/>
+                  </a:schemeClr>
+                </a:solidFill>
+              </a:rPr>
+              <a:t>Banks and fintechs collect data every time you </a:t>
+            </a:r>
+            <a:r>
+              <a:rPr lang="en-US" sz="2400" i="1" dirty="0">
+                <a:solidFill>
+                  <a:schemeClr val="accent6">
+                    <a:lumMod val="60000"/>
+                    <a:lumOff val="40000"/>
+                  </a:schemeClr>
+                </a:solidFill>
+              </a:rPr>
+              <a:t>open</a:t>
+            </a:r>
+            <a:r>
+              <a:rPr lang="en-US" sz="2400" dirty="0">
+                <a:solidFill>
+                  <a:schemeClr val="accent6">
+                    <a:lumMod val="60000"/>
+                    <a:lumOff val="40000"/>
+                  </a:schemeClr>
+                </a:solidFill>
+              </a:rPr>
+              <a:t>, </a:t>
+            </a:r>
+            <a:r>
+              <a:rPr lang="en-US" sz="2400" i="1" dirty="0">
+                <a:solidFill>
+                  <a:schemeClr val="accent6">
+                    <a:lumMod val="60000"/>
+                    <a:lumOff val="40000"/>
+                  </a:schemeClr>
+                </a:solidFill>
+              </a:rPr>
+              <a:t>tap</a:t>
+            </a:r>
+            <a:r>
+              <a:rPr lang="en-US" sz="2400" dirty="0">
+                <a:solidFill>
+                  <a:schemeClr val="accent6">
+                    <a:lumMod val="60000"/>
+                    <a:lumOff val="40000"/>
+                  </a:schemeClr>
+                </a:solidFill>
+              </a:rPr>
+              <a:t>, or </a:t>
+            </a:r>
+            <a:r>
+              <a:rPr lang="en-US" sz="2400" i="1" dirty="0">
+                <a:solidFill>
+                  <a:schemeClr val="accent6">
+                    <a:lumMod val="60000"/>
+                    <a:lumOff val="40000"/>
+                  </a:schemeClr>
+                </a:solidFill>
+              </a:rPr>
+              <a:t>scroll</a:t>
+            </a:r>
+            <a:r>
+              <a:rPr lang="en-US" sz="2400" dirty="0">
+                <a:solidFill>
+                  <a:schemeClr val="accent6">
+                    <a:lumMod val="60000"/>
+                    <a:lumOff val="40000"/>
+                  </a:schemeClr>
+                </a:solidFill>
+              </a:rPr>
+              <a:t> — even when you don't complete a transaction.</a:t>
+            </a:r>
+          </a:p>
+          <a:p>
+            <a:pPr>
+              <a:buNone/>
+            </a:pPr>
+            <a:endParaRPr lang="en-US" sz="2400" dirty="0">
+              <a:solidFill>
+                <a:schemeClr val="accent6">
+                  <a:lumMod val="60000"/>
+                  <a:lumOff val="40000"/>
+                </a:schemeClr>
+              </a:solidFill>
+            </a:endParaRPr>
+          </a:p>
+          <a:p>
+            <a:pPr>
+              <a:buNone/>
+            </a:pPr>
+            <a:r>
+              <a:rPr lang="en-US" sz="2400" dirty="0">
+                <a:solidFill>
+                  <a:schemeClr val="accent6">
+                    <a:lumMod val="60000"/>
+                    <a:lumOff val="40000"/>
+                  </a:schemeClr>
+                </a:solidFill>
+              </a:rPr>
+              <a:t>What gets logged:</a:t>
+            </a:r>
+          </a:p>
+          <a:p>
+            <a:pPr marL="342900" indent="-342900">
+              <a:buFont typeface="Arial" panose="020B0604020202020204" pitchFamily="34" charset="0"/>
+              <a:buChar char="•"/>
+            </a:pPr>
+            <a:r>
+              <a:rPr lang="en-US" sz="2400" dirty="0">
+                <a:solidFill>
+                  <a:schemeClr val="accent6">
+                    <a:lumMod val="60000"/>
+                    <a:lumOff val="40000"/>
+                  </a:schemeClr>
+                </a:solidFill>
+              </a:rPr>
+              <a:t>Time and location of every app open</a:t>
+            </a:r>
+          </a:p>
+          <a:p>
+            <a:pPr marL="342900" indent="-342900">
+              <a:buFont typeface="Arial" panose="020B0604020202020204" pitchFamily="34" charset="0"/>
+              <a:buChar char="•"/>
+            </a:pPr>
+            <a:r>
+              <a:rPr lang="en-US" sz="2400" dirty="0">
+                <a:solidFill>
+                  <a:schemeClr val="accent6">
+                    <a:lumMod val="60000"/>
+                    <a:lumOff val="40000"/>
+                  </a:schemeClr>
+                </a:solidFill>
+              </a:rPr>
+              <a:t>Which screens you visit and for how long</a:t>
+            </a:r>
+          </a:p>
+          <a:p>
+            <a:pPr marL="342900" indent="-342900">
+              <a:buFont typeface="Arial" panose="020B0604020202020204" pitchFamily="34" charset="0"/>
+              <a:buChar char="•"/>
+            </a:pPr>
+            <a:r>
+              <a:rPr lang="en-US" sz="2400" dirty="0">
+                <a:solidFill>
+                  <a:schemeClr val="accent6">
+                    <a:lumMod val="60000"/>
+                    <a:lumOff val="40000"/>
+                  </a:schemeClr>
+                </a:solidFill>
+              </a:rPr>
+              <a:t>Abandoned actions (e.g. you started a transfer, then stopped)</a:t>
+            </a:r>
+          </a:p>
+          <a:p>
+            <a:pPr marL="342900" indent="-342900">
+              <a:buFont typeface="Arial" panose="020B0604020202020204" pitchFamily="34" charset="0"/>
+              <a:buChar char="•"/>
+            </a:pPr>
+            <a:r>
+              <a:rPr lang="en-US" sz="2400" dirty="0">
+                <a:solidFill>
+                  <a:schemeClr val="accent6">
+                    <a:lumMod val="60000"/>
+                    <a:lumOff val="40000"/>
+                  </a:schemeClr>
+                </a:solidFill>
+              </a:rPr>
+              <a:t>Device type, IP address, battery level</a:t>
+            </a:r>
+          </a:p>
+        </p:txBody>
+      </p:sp>
+    </p:spTree>
+    <p:extLst>
+      <p:ext uri="{BB962C8B-B14F-4D97-AF65-F5344CB8AC3E}">
+        <p14:creationId xmlns:p14="http://schemas.microsoft.com/office/powerpoint/2010/main" val="4221193315"/>
+      </p:ext>
+    </p:extLst>
+  </p:cSld>
+  <p:clrMapOvr>
+    <a:masterClrMapping/>
+  </p:clrMapOvr>
+</p:sld>
+</file>
+
+<file path=ppt/slides/slide20.xml><?xml version="1.0" encoding="utf-8"?>
 <p:sld xmlns:a="http://schemas.openxmlformats.org/drawingml/2006/main" xmlns:r="http://schemas.openxmlformats.org/officeDocument/2006/relationships" xmlns:p="http://schemas.openxmlformats.org/presentationml/2006/main">
   <p:cSld>
     <p:spTree>
@@ -5884,7 +7237,7 @@
 </p:sld>
 </file>
 
-<file path=ppt/slides/slide17.xml><?xml version="1.0" encoding="utf-8"?>
+<file path=ppt/slides/slide21.xml><?xml version="1.0" encoding="utf-8"?>
 <p:sld xmlns:a="http://schemas.openxmlformats.org/drawingml/2006/main" xmlns:r="http://schemas.openxmlformats.org/officeDocument/2006/relationships" xmlns:p="http://schemas.openxmlformats.org/presentationml/2006/main">
   <p:cSld>
     <p:spTree>
@@ -6143,7 +7496,7 @@
 </p:sld>
 </file>
 
-<file path=ppt/slides/slide18.xml><?xml version="1.0" encoding="utf-8"?>
+<file path=ppt/slides/slide22.xml><?xml version="1.0" encoding="utf-8"?>
 <p:sld xmlns:a="http://schemas.openxmlformats.org/drawingml/2006/main" xmlns:r="http://schemas.openxmlformats.org/officeDocument/2006/relationships" xmlns:p="http://schemas.openxmlformats.org/presentationml/2006/main">
   <p:cSld>
     <p:spTree>
@@ -6343,7 +7696,7 @@
 </p:sld>
 </file>
 
-<file path=ppt/slides/slide19.xml><?xml version="1.0" encoding="utf-8"?>
+<file path=ppt/slides/slide23.xml><?xml version="1.0" encoding="utf-8"?>
 <p:sld xmlns:a="http://schemas.openxmlformats.org/drawingml/2006/main" xmlns:r="http://schemas.openxmlformats.org/officeDocument/2006/relationships" xmlns:p="http://schemas.openxmlformats.org/presentationml/2006/main">
   <p:cSld>
     <p:spTree>
@@ -6587,304 +7940,7 @@
 </p:sld>
 </file>
 
-<file path=ppt/slides/slide2.xml><?xml version="1.0" encoding="utf-8"?>
-<p:sld xmlns:a="http://schemas.openxmlformats.org/drawingml/2006/main" xmlns:r="http://schemas.openxmlformats.org/officeDocument/2006/relationships" xmlns:p="http://schemas.openxmlformats.org/presentationml/2006/main">
-  <p:cSld>
-    <p:spTree>
-      <p:nvGrpSpPr>
-        <p:cNvPr id="1" name=""/>
-        <p:cNvGrpSpPr/>
-        <p:nvPr/>
-      </p:nvGrpSpPr>
-      <p:grpSpPr>
-        <a:xfrm>
-          <a:off x="0" y="0"/>
-          <a:ext cx="0" cy="0"/>
-          <a:chOff x="0" y="0"/>
-          <a:chExt cx="0" cy="0"/>
-        </a:xfrm>
-      </p:grpSpPr>
-      <p:pic>
-        <p:nvPicPr>
-          <p:cNvPr id="3" name="Picture 2">
-            <a:extLst>
-              <a:ext uri="{FF2B5EF4-FFF2-40B4-BE49-F238E27FC236}">
-                <a16:creationId xmlns:a16="http://schemas.microsoft.com/office/drawing/2014/main" id="{07597750-66B5-9BE5-3B00-CD63A4EB1CB6}"/>
-              </a:ext>
-            </a:extLst>
-          </p:cNvPr>
-          <p:cNvPicPr>
-            <a:picLocks noChangeAspect="1"/>
-          </p:cNvPicPr>
-          <p:nvPr/>
-        </p:nvPicPr>
-        <p:blipFill>
-          <a:blip r:embed="rId2"/>
-          <a:stretch>
-            <a:fillRect/>
-          </a:stretch>
-        </p:blipFill>
-        <p:spPr>
-          <a:xfrm>
-            <a:off x="9235994" y="0"/>
-            <a:ext cx="2956006" cy="2048256"/>
-          </a:xfrm>
-          <a:prstGeom prst="rect">
-            <a:avLst/>
-          </a:prstGeom>
-        </p:spPr>
-      </p:pic>
-      <p:sp>
-        <p:nvSpPr>
-          <p:cNvPr id="5" name="TextBox 4">
-            <a:extLst>
-              <a:ext uri="{FF2B5EF4-FFF2-40B4-BE49-F238E27FC236}">
-                <a16:creationId xmlns:a16="http://schemas.microsoft.com/office/drawing/2014/main" id="{73CECE56-F5BF-2325-7236-4629AED98577}"/>
-              </a:ext>
-            </a:extLst>
-          </p:cNvPr>
-          <p:cNvSpPr txBox="1"/>
-          <p:nvPr/>
-        </p:nvSpPr>
-        <p:spPr>
-          <a:xfrm>
-            <a:off x="310896" y="921526"/>
-            <a:ext cx="8622792" cy="3785652"/>
-          </a:xfrm>
-          <a:prstGeom prst="rect">
-            <a:avLst/>
-          </a:prstGeom>
-          <a:noFill/>
-        </p:spPr>
-        <p:txBody>
-          <a:bodyPr wrap="square">
-            <a:spAutoFit/>
-          </a:bodyPr>
-          <a:lstStyle/>
-          <a:p>
-            <a:pPr>
-              <a:buNone/>
-            </a:pPr>
-            <a:r>
-              <a:rPr lang="en-US" sz="2400" b="1" dirty="0">
-                <a:solidFill>
-                  <a:schemeClr val="accent6">
-                    <a:lumMod val="60000"/>
-                    <a:lumOff val="40000"/>
-                  </a:schemeClr>
-                </a:solidFill>
-              </a:rPr>
-              <a:t>The App That Never Sleeps</a:t>
-            </a:r>
-          </a:p>
-          <a:p>
-            <a:pPr>
-              <a:buNone/>
-            </a:pPr>
-            <a:endParaRPr lang="en-US" sz="2400" dirty="0">
-              <a:solidFill>
-                <a:schemeClr val="accent6">
-                  <a:lumMod val="60000"/>
-                  <a:lumOff val="40000"/>
-                </a:schemeClr>
-              </a:solidFill>
-            </a:endParaRPr>
-          </a:p>
-          <a:p>
-            <a:pPr>
-              <a:buNone/>
-            </a:pPr>
-            <a:r>
-              <a:rPr lang="en-US" sz="2400" dirty="0">
-                <a:solidFill>
-                  <a:schemeClr val="accent6">
-                    <a:lumMod val="60000"/>
-                    <a:lumOff val="40000"/>
-                  </a:schemeClr>
-                </a:solidFill>
-              </a:rPr>
-              <a:t>Banks and fintechs collect data every time you </a:t>
-            </a:r>
-            <a:r>
-              <a:rPr lang="en-US" sz="2400" i="1" dirty="0">
-                <a:solidFill>
-                  <a:schemeClr val="accent6">
-                    <a:lumMod val="60000"/>
-                    <a:lumOff val="40000"/>
-                  </a:schemeClr>
-                </a:solidFill>
-              </a:rPr>
-              <a:t>open</a:t>
-            </a:r>
-            <a:r>
-              <a:rPr lang="en-US" sz="2400" dirty="0">
-                <a:solidFill>
-                  <a:schemeClr val="accent6">
-                    <a:lumMod val="60000"/>
-                    <a:lumOff val="40000"/>
-                  </a:schemeClr>
-                </a:solidFill>
-              </a:rPr>
-              <a:t>, </a:t>
-            </a:r>
-            <a:r>
-              <a:rPr lang="en-US" sz="2400" i="1" dirty="0">
-                <a:solidFill>
-                  <a:schemeClr val="accent6">
-                    <a:lumMod val="60000"/>
-                    <a:lumOff val="40000"/>
-                  </a:schemeClr>
-                </a:solidFill>
-              </a:rPr>
-              <a:t>tap</a:t>
-            </a:r>
-            <a:r>
-              <a:rPr lang="en-US" sz="2400" dirty="0">
-                <a:solidFill>
-                  <a:schemeClr val="accent6">
-                    <a:lumMod val="60000"/>
-                    <a:lumOff val="40000"/>
-                  </a:schemeClr>
-                </a:solidFill>
-              </a:rPr>
-              <a:t>, or </a:t>
-            </a:r>
-            <a:r>
-              <a:rPr lang="en-US" sz="2400" i="1" dirty="0">
-                <a:solidFill>
-                  <a:schemeClr val="accent6">
-                    <a:lumMod val="60000"/>
-                    <a:lumOff val="40000"/>
-                  </a:schemeClr>
-                </a:solidFill>
-              </a:rPr>
-              <a:t>scroll</a:t>
-            </a:r>
-            <a:r>
-              <a:rPr lang="en-US" sz="2400" dirty="0">
-                <a:solidFill>
-                  <a:schemeClr val="accent6">
-                    <a:lumMod val="60000"/>
-                    <a:lumOff val="40000"/>
-                  </a:schemeClr>
-                </a:solidFill>
-              </a:rPr>
-              <a:t> — even when you don't complete a transaction.</a:t>
-            </a:r>
-          </a:p>
-          <a:p>
-            <a:pPr>
-              <a:buNone/>
-            </a:pPr>
-            <a:endParaRPr lang="en-US" sz="2400" dirty="0">
-              <a:solidFill>
-                <a:schemeClr val="accent6">
-                  <a:lumMod val="60000"/>
-                  <a:lumOff val="40000"/>
-                </a:schemeClr>
-              </a:solidFill>
-            </a:endParaRPr>
-          </a:p>
-          <a:p>
-            <a:pPr>
-              <a:buNone/>
-            </a:pPr>
-            <a:r>
-              <a:rPr lang="en-US" sz="2400" dirty="0">
-                <a:solidFill>
-                  <a:schemeClr val="accent6">
-                    <a:lumMod val="60000"/>
-                    <a:lumOff val="40000"/>
-                  </a:schemeClr>
-                </a:solidFill>
-              </a:rPr>
-              <a:t>What gets logged:</a:t>
-            </a:r>
-          </a:p>
-          <a:p>
-            <a:pPr marL="342900" indent="-342900">
-              <a:buFont typeface="Arial" panose="020B0604020202020204" pitchFamily="34" charset="0"/>
-              <a:buChar char="•"/>
-            </a:pPr>
-            <a:r>
-              <a:rPr lang="en-US" sz="2400" dirty="0">
-                <a:solidFill>
-                  <a:schemeClr val="accent6">
-                    <a:lumMod val="60000"/>
-                    <a:lumOff val="40000"/>
-                  </a:schemeClr>
-                </a:solidFill>
-              </a:rPr>
-              <a:t>Time and location of every app open</a:t>
-            </a:r>
-          </a:p>
-          <a:p>
-            <a:pPr marL="342900" indent="-342900">
-              <a:buFont typeface="Arial" panose="020B0604020202020204" pitchFamily="34" charset="0"/>
-              <a:buChar char="•"/>
-            </a:pPr>
-            <a:r>
-              <a:rPr lang="en-US" sz="2400" dirty="0">
-                <a:solidFill>
-                  <a:schemeClr val="accent6">
-                    <a:lumMod val="60000"/>
-                    <a:lumOff val="40000"/>
-                  </a:schemeClr>
-                </a:solidFill>
-              </a:rPr>
-              <a:t>Which screens you visit and for how long</a:t>
-            </a:r>
-          </a:p>
-          <a:p>
-            <a:pPr marL="342900" indent="-342900">
-              <a:buFont typeface="Arial" panose="020B0604020202020204" pitchFamily="34" charset="0"/>
-              <a:buChar char="•"/>
-            </a:pPr>
-            <a:r>
-              <a:rPr lang="en-US" sz="2400" dirty="0">
-                <a:solidFill>
-                  <a:schemeClr val="accent6">
-                    <a:lumMod val="60000"/>
-                    <a:lumOff val="40000"/>
-                  </a:schemeClr>
-                </a:solidFill>
-              </a:rPr>
-              <a:t>Abandoned actions (e.g. you started a transfer, then stopped)</a:t>
-            </a:r>
-          </a:p>
-          <a:p>
-            <a:pPr marL="342900" indent="-342900">
-              <a:buFont typeface="Arial" panose="020B0604020202020204" pitchFamily="34" charset="0"/>
-              <a:buChar char="•"/>
-            </a:pPr>
-            <a:r>
-              <a:rPr lang="en-US" sz="2400" dirty="0">
-                <a:solidFill>
-                  <a:schemeClr val="accent6">
-                    <a:lumMod val="60000"/>
-                    <a:lumOff val="40000"/>
-                  </a:schemeClr>
-                </a:solidFill>
-              </a:rPr>
-              <a:t>Device type, IP address, battery level</a:t>
-            </a:r>
-          </a:p>
-        </p:txBody>
-      </p:sp>
-    </p:spTree>
-    <p:extLst>
-      <p:ext uri="{BB962C8B-B14F-4D97-AF65-F5344CB8AC3E}">
-        <p14:creationId xmlns:p14="http://schemas.microsoft.com/office/powerpoint/2010/main" val="4221193315"/>
-      </p:ext>
-    </p:extLst>
-  </p:cSld>
-  <p:clrMapOvr>
-    <a:masterClrMapping/>
-  </p:clrMapOvr>
-</p:sld>
-</file>
-
-<file path=ppt/slides/slide20.xml><?xml version="1.0" encoding="utf-8"?>
+<file path=ppt/slides/slide24.xml><?xml version="1.0" encoding="utf-8"?>
 <p:sld xmlns:a="http://schemas.openxmlformats.org/drawingml/2006/main" xmlns:r="http://schemas.openxmlformats.org/officeDocument/2006/relationships" xmlns:p="http://schemas.openxmlformats.org/presentationml/2006/main">
   <p:cSld>
     <p:spTree>
@@ -7143,7 +8199,7 @@
 </p:sld>
 </file>
 
-<file path=ppt/slides/slide21.xml><?xml version="1.0" encoding="utf-8"?>
+<file path=ppt/slides/slide25.xml><?xml version="1.0" encoding="utf-8"?>
 <p:sld xmlns:a="http://schemas.openxmlformats.org/drawingml/2006/main" xmlns:r="http://schemas.openxmlformats.org/officeDocument/2006/relationships" xmlns:p="http://schemas.openxmlformats.org/presentationml/2006/main">
   <p:cSld>
     <p:spTree>
@@ -7385,7 +8441,7 @@
 </p:sld>
 </file>
 
-<file path=ppt/slides/slide22.xml><?xml version="1.0" encoding="utf-8"?>
+<file path=ppt/slides/slide26.xml><?xml version="1.0" encoding="utf-8"?>
 <p:sld xmlns:a="http://schemas.openxmlformats.org/drawingml/2006/main" xmlns:r="http://schemas.openxmlformats.org/officeDocument/2006/relationships" xmlns:p="http://schemas.openxmlformats.org/presentationml/2006/main">
   <p:cSld>
     <p:spTree>
@@ -7586,7 +8642,7 @@
 </p:sld>
 </file>
 
-<file path=ppt/slides/slide23.xml><?xml version="1.0" encoding="utf-8"?>
+<file path=ppt/slides/slide27.xml><?xml version="1.0" encoding="utf-8"?>
 <p:sld xmlns:a="http://schemas.openxmlformats.org/drawingml/2006/main" xmlns:r="http://schemas.openxmlformats.org/officeDocument/2006/relationships" xmlns:p="http://schemas.openxmlformats.org/presentationml/2006/main">
   <p:cSld>
     <p:spTree>
@@ -7630,6 +8686,657 @@
         <p:cNvPr id="1" name="">
           <a:extLst>
             <a:ext uri="{FF2B5EF4-FFF2-40B4-BE49-F238E27FC236}">
+              <a16:creationId xmlns:a16="http://schemas.microsoft.com/office/drawing/2014/main" id="{672DBB06-3E53-C1A1-D374-D0BAB2DED1B0}"/>
+            </a:ext>
+          </a:extLst>
+        </p:cNvPr>
+        <p:cNvGrpSpPr/>
+        <p:nvPr/>
+      </p:nvGrpSpPr>
+      <p:grpSpPr>
+        <a:xfrm>
+          <a:off x="0" y="0"/>
+          <a:ext cx="0" cy="0"/>
+          <a:chOff x="0" y="0"/>
+          <a:chExt cx="0" cy="0"/>
+        </a:xfrm>
+      </p:grpSpPr>
+      <p:pic>
+        <p:nvPicPr>
+          <p:cNvPr id="7" name="Picture 6">
+            <a:extLst>
+              <a:ext uri="{FF2B5EF4-FFF2-40B4-BE49-F238E27FC236}">
+                <a16:creationId xmlns:a16="http://schemas.microsoft.com/office/drawing/2014/main" id="{C08F4ED9-1726-93AD-0F53-3AE8A064458E}"/>
+              </a:ext>
+            </a:extLst>
+          </p:cNvPr>
+          <p:cNvPicPr>
+            <a:picLocks noChangeAspect="1"/>
+          </p:cNvPicPr>
+          <p:nvPr/>
+        </p:nvPicPr>
+        <p:blipFill>
+          <a:blip r:embed="rId2"/>
+          <a:stretch>
+            <a:fillRect/>
+          </a:stretch>
+        </p:blipFill>
+        <p:spPr>
+          <a:xfrm>
+            <a:off x="0" y="0"/>
+            <a:ext cx="12192000" cy="3074973"/>
+          </a:xfrm>
+          <a:prstGeom prst="rect">
+            <a:avLst/>
+          </a:prstGeom>
+        </p:spPr>
+      </p:pic>
+      <p:sp>
+        <p:nvSpPr>
+          <p:cNvPr id="9" name="TextBox 8">
+            <a:extLst>
+              <a:ext uri="{FF2B5EF4-FFF2-40B4-BE49-F238E27FC236}">
+                <a16:creationId xmlns:a16="http://schemas.microsoft.com/office/drawing/2014/main" id="{EA8E3281-0277-CC12-1FB1-E0BD40C80851}"/>
+              </a:ext>
+            </a:extLst>
+          </p:cNvPr>
+          <p:cNvSpPr txBox="1"/>
+          <p:nvPr/>
+        </p:nvSpPr>
+        <p:spPr>
+          <a:xfrm>
+            <a:off x="320040" y="3352847"/>
+            <a:ext cx="9043416" cy="3046988"/>
+          </a:xfrm>
+          <a:prstGeom prst="rect">
+            <a:avLst/>
+          </a:prstGeom>
+          <a:noFill/>
+        </p:spPr>
+        <p:txBody>
+          <a:bodyPr wrap="square">
+            <a:spAutoFit/>
+          </a:bodyPr>
+          <a:lstStyle/>
+          <a:p>
+            <a:pPr algn="l">
+              <a:buNone/>
+            </a:pPr>
+            <a:r>
+              <a:rPr lang="en-US" sz="2400" dirty="0">
+                <a:solidFill>
+                  <a:schemeClr val="accent6">
+                    <a:lumMod val="60000"/>
+                    <a:lumOff val="40000"/>
+                  </a:schemeClr>
+                </a:solidFill>
+                <a:latin typeface="system-ui"/>
+              </a:rPr>
+              <a:t>S</a:t>
+            </a:r>
+            <a:r>
+              <a:rPr lang="en-US" sz="2400" b="0" i="0" dirty="0">
+                <a:solidFill>
+                  <a:schemeClr val="accent6">
+                    <a:lumMod val="60000"/>
+                    <a:lumOff val="40000"/>
+                  </a:schemeClr>
+                </a:solidFill>
+                <a:effectLst/>
+                <a:latin typeface="system-ui"/>
+              </a:rPr>
+              <a:t>tories hidden in the data:</a:t>
+            </a:r>
+          </a:p>
+          <a:p>
+            <a:pPr algn="l">
+              <a:buNone/>
+            </a:pPr>
+            <a:endParaRPr lang="en-US" sz="2400" b="0" i="0" dirty="0">
+              <a:solidFill>
+                <a:schemeClr val="accent6">
+                  <a:lumMod val="60000"/>
+                  <a:lumOff val="40000"/>
+                </a:schemeClr>
+              </a:solidFill>
+              <a:effectLst/>
+              <a:latin typeface="system-ui"/>
+            </a:endParaRPr>
+          </a:p>
+          <a:p>
+            <a:pPr algn="l">
+              <a:buFont typeface="+mj-lt"/>
+              <a:buAutoNum type="arabicPeriod"/>
+            </a:pPr>
+            <a:r>
+              <a:rPr lang="en-US" sz="2400" b="1" i="0" dirty="0">
+                <a:solidFill>
+                  <a:schemeClr val="accent6">
+                    <a:lumMod val="60000"/>
+                    <a:lumOff val="40000"/>
+                  </a:schemeClr>
+                </a:solidFill>
+                <a:effectLst/>
+                <a:latin typeface="system-ui"/>
+              </a:rPr>
+              <a:t> Customer JO-10042 </a:t>
+            </a:r>
+            <a:r>
+              <a:rPr lang="en-US" sz="2400" b="0" i="0" dirty="0">
+                <a:solidFill>
+                  <a:schemeClr val="accent6">
+                    <a:lumMod val="60000"/>
+                    <a:lumOff val="40000"/>
+                  </a:schemeClr>
+                </a:solidFill>
+                <a:effectLst/>
+                <a:latin typeface="system-ui"/>
+              </a:rPr>
+              <a:t>started a money transfer and abandoned it — the bank now knows they intended to send money but stopped. </a:t>
+            </a:r>
+          </a:p>
+          <a:p>
+            <a:pPr algn="l">
+              <a:buFont typeface="+mj-lt"/>
+              <a:buAutoNum type="arabicPeriod"/>
+            </a:pPr>
+            <a:endParaRPr lang="en-US" sz="2400" b="0" i="0" dirty="0">
+              <a:solidFill>
+                <a:schemeClr val="accent6">
+                  <a:lumMod val="60000"/>
+                  <a:lumOff val="40000"/>
+                </a:schemeClr>
+              </a:solidFill>
+              <a:effectLst/>
+              <a:latin typeface="system-ui"/>
+            </a:endParaRPr>
+          </a:p>
+          <a:p>
+            <a:pPr algn="l"/>
+            <a:r>
+              <a:rPr lang="en-US" sz="2400" b="0" i="0" dirty="0">
+                <a:solidFill>
+                  <a:schemeClr val="accent6">
+                    <a:lumMod val="60000"/>
+                    <a:lumOff val="40000"/>
+                  </a:schemeClr>
+                </a:solidFill>
+                <a:effectLst/>
+                <a:latin typeface="system-ui"/>
+              </a:rPr>
+              <a:t>Why? - Financial hesitation? Wrong account details? </a:t>
+            </a:r>
+          </a:p>
+          <a:p>
+            <a:pPr algn="l"/>
+            <a:endParaRPr lang="en-US" sz="2400" dirty="0">
+              <a:solidFill>
+                <a:schemeClr val="accent6">
+                  <a:lumMod val="60000"/>
+                  <a:lumOff val="40000"/>
+                </a:schemeClr>
+              </a:solidFill>
+              <a:latin typeface="system-ui"/>
+            </a:endParaRPr>
+          </a:p>
+          <a:p>
+            <a:pPr algn="l"/>
+            <a:r>
+              <a:rPr lang="en-US" sz="2400" b="0" i="0" dirty="0">
+                <a:solidFill>
+                  <a:schemeClr val="accent6">
+                    <a:lumMod val="60000"/>
+                    <a:lumOff val="40000"/>
+                  </a:schemeClr>
+                </a:solidFill>
+                <a:effectLst/>
+                <a:latin typeface="system-ui"/>
+              </a:rPr>
+              <a:t>This gets flagged for a follow-up push notification.</a:t>
+            </a:r>
+          </a:p>
+        </p:txBody>
+      </p:sp>
+    </p:spTree>
+    <p:extLst>
+      <p:ext uri="{BB962C8B-B14F-4D97-AF65-F5344CB8AC3E}">
+        <p14:creationId xmlns:p14="http://schemas.microsoft.com/office/powerpoint/2010/main" val="1672886670"/>
+      </p:ext>
+    </p:extLst>
+  </p:cSld>
+  <p:clrMapOvr>
+    <a:masterClrMapping/>
+  </p:clrMapOvr>
+</p:sld>
+</file>
+
+<file path=ppt/slides/slide4.xml><?xml version="1.0" encoding="utf-8"?>
+<p:sld xmlns:a="http://schemas.openxmlformats.org/drawingml/2006/main" xmlns:r="http://schemas.openxmlformats.org/officeDocument/2006/relationships" xmlns:p="http://schemas.openxmlformats.org/presentationml/2006/main">
+  <p:cSld>
+    <p:spTree>
+      <p:nvGrpSpPr>
+        <p:cNvPr id="1" name="">
+          <a:extLst>
+            <a:ext uri="{FF2B5EF4-FFF2-40B4-BE49-F238E27FC236}">
+              <a16:creationId xmlns:a16="http://schemas.microsoft.com/office/drawing/2014/main" id="{BA64501B-4032-F545-E508-68BE19C3F5E0}"/>
+            </a:ext>
+          </a:extLst>
+        </p:cNvPr>
+        <p:cNvGrpSpPr/>
+        <p:nvPr/>
+      </p:nvGrpSpPr>
+      <p:grpSpPr>
+        <a:xfrm>
+          <a:off x="0" y="0"/>
+          <a:ext cx="0" cy="0"/>
+          <a:chOff x="0" y="0"/>
+          <a:chExt cx="0" cy="0"/>
+        </a:xfrm>
+      </p:grpSpPr>
+      <p:sp>
+        <p:nvSpPr>
+          <p:cNvPr id="9" name="TextBox 8">
+            <a:extLst>
+              <a:ext uri="{FF2B5EF4-FFF2-40B4-BE49-F238E27FC236}">
+                <a16:creationId xmlns:a16="http://schemas.microsoft.com/office/drawing/2014/main" id="{92CE6CEC-06C0-37E8-47FC-0075ABB695DF}"/>
+              </a:ext>
+            </a:extLst>
+          </p:cNvPr>
+          <p:cNvSpPr txBox="1"/>
+          <p:nvPr/>
+        </p:nvSpPr>
+        <p:spPr>
+          <a:xfrm>
+            <a:off x="246888" y="2798493"/>
+            <a:ext cx="10479024" cy="3046988"/>
+          </a:xfrm>
+          <a:prstGeom prst="rect">
+            <a:avLst/>
+          </a:prstGeom>
+          <a:noFill/>
+        </p:spPr>
+        <p:txBody>
+          <a:bodyPr wrap="square">
+            <a:spAutoFit/>
+          </a:bodyPr>
+          <a:lstStyle/>
+          <a:p>
+            <a:pPr algn="l">
+              <a:buNone/>
+            </a:pPr>
+            <a:r>
+              <a:rPr lang="en-US" sz="2400" dirty="0">
+                <a:solidFill>
+                  <a:schemeClr val="accent6">
+                    <a:lumMod val="60000"/>
+                    <a:lumOff val="40000"/>
+                  </a:schemeClr>
+                </a:solidFill>
+                <a:latin typeface="Calibiri body"/>
+              </a:rPr>
+              <a:t>S</a:t>
+            </a:r>
+            <a:r>
+              <a:rPr lang="en-US" sz="2400" b="0" i="0" dirty="0">
+                <a:solidFill>
+                  <a:schemeClr val="accent6">
+                    <a:lumMod val="60000"/>
+                    <a:lumOff val="40000"/>
+                  </a:schemeClr>
+                </a:solidFill>
+                <a:effectLst/>
+                <a:latin typeface="Calibiri body"/>
+              </a:rPr>
+              <a:t>tories hidden in the data:</a:t>
+            </a:r>
+          </a:p>
+          <a:p>
+            <a:pPr algn="l">
+              <a:buNone/>
+            </a:pPr>
+            <a:endParaRPr lang="en-US" sz="2400" b="0" i="0" dirty="0">
+              <a:solidFill>
+                <a:schemeClr val="accent6">
+                  <a:lumMod val="60000"/>
+                  <a:lumOff val="40000"/>
+                </a:schemeClr>
+              </a:solidFill>
+              <a:effectLst/>
+              <a:latin typeface="Calibiri body"/>
+            </a:endParaRPr>
+          </a:p>
+          <a:p>
+            <a:r>
+              <a:rPr lang="en-US" sz="2400" b="1" dirty="0">
+                <a:solidFill>
+                  <a:schemeClr val="accent6">
+                    <a:lumMod val="60000"/>
+                    <a:lumOff val="40000"/>
+                  </a:schemeClr>
+                </a:solidFill>
+                <a:latin typeface="Calibiri body"/>
+              </a:rPr>
+              <a:t>2. Customer JO-10091</a:t>
+            </a:r>
+            <a:r>
+              <a:rPr lang="en-US" sz="2400" dirty="0">
+                <a:solidFill>
+                  <a:schemeClr val="accent6">
+                    <a:lumMod val="60000"/>
+                    <a:lumOff val="40000"/>
+                  </a:schemeClr>
+                </a:solidFill>
+                <a:latin typeface="Calibiri body"/>
+              </a:rPr>
+              <a:t> spent 3.5 minutes on the loan calculator in Zarqa, then opened the application form and abandoned it. </a:t>
+            </a:r>
+          </a:p>
+          <a:p>
+            <a:endParaRPr lang="en-US" sz="2400" dirty="0">
+              <a:solidFill>
+                <a:schemeClr val="accent6">
+                  <a:lumMod val="60000"/>
+                  <a:lumOff val="40000"/>
+                </a:schemeClr>
+              </a:solidFill>
+              <a:latin typeface="Calibiri body"/>
+            </a:endParaRPr>
+          </a:p>
+          <a:p>
+            <a:r>
+              <a:rPr lang="en-US" sz="2400" dirty="0">
+                <a:solidFill>
+                  <a:schemeClr val="accent6">
+                    <a:lumMod val="60000"/>
+                    <a:lumOff val="40000"/>
+                  </a:schemeClr>
+                </a:solidFill>
+                <a:latin typeface="Calibiri body"/>
+              </a:rPr>
+              <a:t>To the bank's model, this person wants a loan but something stopped them. </a:t>
+            </a:r>
+          </a:p>
+          <a:p>
+            <a:endParaRPr lang="en-US" sz="2400" dirty="0">
+              <a:solidFill>
+                <a:schemeClr val="accent6">
+                  <a:lumMod val="60000"/>
+                  <a:lumOff val="40000"/>
+                </a:schemeClr>
+              </a:solidFill>
+              <a:latin typeface="Calibiri body"/>
+            </a:endParaRPr>
+          </a:p>
+          <a:p>
+            <a:r>
+              <a:rPr lang="en-US" sz="2400" dirty="0">
+                <a:solidFill>
+                  <a:schemeClr val="accent6">
+                    <a:lumMod val="60000"/>
+                    <a:lumOff val="40000"/>
+                  </a:schemeClr>
+                </a:solidFill>
+                <a:latin typeface="Calibiri body"/>
+              </a:rPr>
+              <a:t>High-value re-targeting opportunity.</a:t>
+            </a:r>
+          </a:p>
+        </p:txBody>
+      </p:sp>
+      <p:pic>
+        <p:nvPicPr>
+          <p:cNvPr id="6" name="Picture 5">
+            <a:extLst>
+              <a:ext uri="{FF2B5EF4-FFF2-40B4-BE49-F238E27FC236}">
+                <a16:creationId xmlns:a16="http://schemas.microsoft.com/office/drawing/2014/main" id="{DE6D0A74-DC57-BE77-83B3-7AC5BEAA3EC1}"/>
+              </a:ext>
+            </a:extLst>
+          </p:cNvPr>
+          <p:cNvPicPr>
+            <a:picLocks noChangeAspect="1"/>
+          </p:cNvPicPr>
+          <p:nvPr/>
+        </p:nvPicPr>
+        <p:blipFill>
+          <a:blip r:embed="rId2"/>
+          <a:stretch>
+            <a:fillRect/>
+          </a:stretch>
+        </p:blipFill>
+        <p:spPr>
+          <a:xfrm>
+            <a:off x="0" y="0"/>
+            <a:ext cx="12192000" cy="2528825"/>
+          </a:xfrm>
+          <a:prstGeom prst="rect">
+            <a:avLst/>
+          </a:prstGeom>
+        </p:spPr>
+      </p:pic>
+    </p:spTree>
+    <p:extLst>
+      <p:ext uri="{BB962C8B-B14F-4D97-AF65-F5344CB8AC3E}">
+        <p14:creationId xmlns:p14="http://schemas.microsoft.com/office/powerpoint/2010/main" val="1789398340"/>
+      </p:ext>
+    </p:extLst>
+  </p:cSld>
+  <p:clrMapOvr>
+    <a:masterClrMapping/>
+  </p:clrMapOvr>
+</p:sld>
+</file>
+
+<file path=ppt/slides/slide5.xml><?xml version="1.0" encoding="utf-8"?>
+<p:sld xmlns:a="http://schemas.openxmlformats.org/drawingml/2006/main" xmlns:r="http://schemas.openxmlformats.org/officeDocument/2006/relationships" xmlns:p="http://schemas.openxmlformats.org/presentationml/2006/main">
+  <p:cSld>
+    <p:spTree>
+      <p:nvGrpSpPr>
+        <p:cNvPr id="1" name="">
+          <a:extLst>
+            <a:ext uri="{FF2B5EF4-FFF2-40B4-BE49-F238E27FC236}">
+              <a16:creationId xmlns:a16="http://schemas.microsoft.com/office/drawing/2014/main" id="{D6F24CD8-BA75-8BAC-58A2-28CA03C9B764}"/>
+            </a:ext>
+          </a:extLst>
+        </p:cNvPr>
+        <p:cNvGrpSpPr/>
+        <p:nvPr/>
+      </p:nvGrpSpPr>
+      <p:grpSpPr>
+        <a:xfrm>
+          <a:off x="0" y="0"/>
+          <a:ext cx="0" cy="0"/>
+          <a:chOff x="0" y="0"/>
+          <a:chExt cx="0" cy="0"/>
+        </a:xfrm>
+      </p:grpSpPr>
+      <p:sp>
+        <p:nvSpPr>
+          <p:cNvPr id="9" name="TextBox 8">
+            <a:extLst>
+              <a:ext uri="{FF2B5EF4-FFF2-40B4-BE49-F238E27FC236}">
+                <a16:creationId xmlns:a16="http://schemas.microsoft.com/office/drawing/2014/main" id="{6FAAE422-97B1-B74A-72FA-ACCB6572E990}"/>
+              </a:ext>
+            </a:extLst>
+          </p:cNvPr>
+          <p:cNvSpPr txBox="1"/>
+          <p:nvPr/>
+        </p:nvSpPr>
+        <p:spPr>
+          <a:xfrm>
+            <a:off x="338328" y="2249389"/>
+            <a:ext cx="11494008" cy="2677656"/>
+          </a:xfrm>
+          <a:prstGeom prst="rect">
+            <a:avLst/>
+          </a:prstGeom>
+          <a:noFill/>
+        </p:spPr>
+        <p:txBody>
+          <a:bodyPr wrap="square">
+            <a:spAutoFit/>
+          </a:bodyPr>
+          <a:lstStyle/>
+          <a:p>
+            <a:pPr algn="l">
+              <a:buNone/>
+            </a:pPr>
+            <a:r>
+              <a:rPr lang="en-US" sz="2400" dirty="0">
+                <a:solidFill>
+                  <a:schemeClr val="accent6">
+                    <a:lumMod val="60000"/>
+                    <a:lumOff val="40000"/>
+                  </a:schemeClr>
+                </a:solidFill>
+                <a:latin typeface="Calibiri body"/>
+              </a:rPr>
+              <a:t>S</a:t>
+            </a:r>
+            <a:r>
+              <a:rPr lang="en-US" sz="2400" b="0" i="0" dirty="0">
+                <a:solidFill>
+                  <a:schemeClr val="accent6">
+                    <a:lumMod val="60000"/>
+                    <a:lumOff val="40000"/>
+                  </a:schemeClr>
+                </a:solidFill>
+                <a:effectLst/>
+                <a:latin typeface="Calibiri body"/>
+              </a:rPr>
+              <a:t>tories hidden in the data:</a:t>
+            </a:r>
+          </a:p>
+          <a:p>
+            <a:pPr algn="l">
+              <a:buNone/>
+            </a:pPr>
+            <a:endParaRPr lang="en-US" sz="2400" b="0" i="0" dirty="0">
+              <a:solidFill>
+                <a:schemeClr val="accent6">
+                  <a:lumMod val="60000"/>
+                  <a:lumOff val="40000"/>
+                </a:schemeClr>
+              </a:solidFill>
+              <a:effectLst/>
+              <a:latin typeface="Calibiri body"/>
+            </a:endParaRPr>
+          </a:p>
+          <a:p>
+            <a:r>
+              <a:rPr lang="en-US" sz="2400" dirty="0">
+                <a:solidFill>
+                  <a:schemeClr val="accent6">
+                    <a:lumMod val="60000"/>
+                    <a:lumOff val="40000"/>
+                  </a:schemeClr>
+                </a:solidFill>
+                <a:latin typeface="Calibiri body"/>
+              </a:rPr>
+              <a:t>3. </a:t>
+            </a:r>
+            <a:r>
+              <a:rPr lang="en-US" sz="2400" b="1" dirty="0">
+                <a:solidFill>
+                  <a:schemeClr val="accent6">
+                    <a:lumMod val="60000"/>
+                    <a:lumOff val="40000"/>
+                  </a:schemeClr>
+                </a:solidFill>
+                <a:latin typeface="Calibiri body"/>
+              </a:rPr>
+              <a:t>Customer JO-10055</a:t>
+            </a:r>
+            <a:r>
+              <a:rPr lang="en-US" sz="2400" dirty="0">
+                <a:solidFill>
+                  <a:schemeClr val="accent6">
+                    <a:lumMod val="60000"/>
+                    <a:lumOff val="40000"/>
+                  </a:schemeClr>
+                </a:solidFill>
+                <a:latin typeface="Calibiri body"/>
+              </a:rPr>
+              <a:t> checked their balance three times in two minutes at midnight in Irbid. </a:t>
+            </a:r>
+          </a:p>
+          <a:p>
+            <a:endParaRPr lang="en-US" sz="2400" dirty="0">
+              <a:solidFill>
+                <a:schemeClr val="accent6">
+                  <a:lumMod val="60000"/>
+                  <a:lumOff val="40000"/>
+                </a:schemeClr>
+              </a:solidFill>
+              <a:latin typeface="Calibiri body"/>
+            </a:endParaRPr>
+          </a:p>
+          <a:p>
+            <a:r>
+              <a:rPr lang="en-US" sz="2400" dirty="0">
+                <a:solidFill>
+                  <a:schemeClr val="accent6">
+                    <a:lumMod val="60000"/>
+                    <a:lumOff val="40000"/>
+                  </a:schemeClr>
+                </a:solidFill>
+                <a:latin typeface="Calibiri body"/>
+              </a:rPr>
+              <a:t>Classic financial stress signal — the bank's model scores this customer as higher risk for the next 30 days.</a:t>
+            </a:r>
+          </a:p>
+        </p:txBody>
+      </p:sp>
+      <p:pic>
+        <p:nvPicPr>
+          <p:cNvPr id="4" name="Picture 3">
+            <a:extLst>
+              <a:ext uri="{FF2B5EF4-FFF2-40B4-BE49-F238E27FC236}">
+                <a16:creationId xmlns:a16="http://schemas.microsoft.com/office/drawing/2014/main" id="{0BD7711C-64BF-F20C-C985-F3A494EF6214}"/>
+              </a:ext>
+            </a:extLst>
+          </p:cNvPr>
+          <p:cNvPicPr>
+            <a:picLocks noChangeAspect="1"/>
+          </p:cNvPicPr>
+          <p:nvPr/>
+        </p:nvPicPr>
+        <p:blipFill>
+          <a:blip r:embed="rId2"/>
+          <a:stretch>
+            <a:fillRect/>
+          </a:stretch>
+        </p:blipFill>
+        <p:spPr>
+          <a:xfrm>
+            <a:off x="0" y="0"/>
+            <a:ext cx="12192000" cy="1772816"/>
+          </a:xfrm>
+          <a:prstGeom prst="rect">
+            <a:avLst/>
+          </a:prstGeom>
+        </p:spPr>
+      </p:pic>
+    </p:spTree>
+    <p:extLst>
+      <p:ext uri="{BB962C8B-B14F-4D97-AF65-F5344CB8AC3E}">
+        <p14:creationId xmlns:p14="http://schemas.microsoft.com/office/powerpoint/2010/main" val="841623418"/>
+      </p:ext>
+    </p:extLst>
+  </p:cSld>
+  <p:clrMapOvr>
+    <a:masterClrMapping/>
+  </p:clrMapOvr>
+</p:sld>
+</file>
+
+<file path=ppt/slides/slide6.xml><?xml version="1.0" encoding="utf-8"?>
+<p:sld xmlns:a="http://schemas.openxmlformats.org/drawingml/2006/main" xmlns:r="http://schemas.openxmlformats.org/officeDocument/2006/relationships" xmlns:p="http://schemas.openxmlformats.org/presentationml/2006/main">
+  <p:cSld>
+    <p:spTree>
+      <p:nvGrpSpPr>
+        <p:cNvPr id="1" name="">
+          <a:extLst>
+            <a:ext uri="{FF2B5EF4-FFF2-40B4-BE49-F238E27FC236}">
               <a16:creationId xmlns:a16="http://schemas.microsoft.com/office/drawing/2014/main" id="{F8217D1A-1DB1-EC98-9202-6F6AB18DF5CE}"/>
             </a:ext>
           </a:extLst>
@@ -7690,7 +9397,7 @@
         <p:spPr>
           <a:xfrm>
             <a:off x="310896" y="921526"/>
-            <a:ext cx="8622792" cy="3785652"/>
+            <a:ext cx="8622792" cy="4154984"/>
           </a:xfrm>
           <a:prstGeom prst="rect">
             <a:avLst/>
@@ -7822,7 +9529,42 @@
                   </a:schemeClr>
                 </a:solidFill>
               </a:rPr>
-              <a:t> Jordan Islamic Bank's app logs which features users browse most. Users who repeatedly check the investments section get targeted with sukuk product offers.</a:t>
+              <a:t> </a:t>
+            </a:r>
+          </a:p>
+          <a:p>
+            <a:r>
+              <a:rPr lang="en-US" sz="2400" dirty="0">
+                <a:solidFill>
+                  <a:schemeClr val="accent6">
+                    <a:lumMod val="60000"/>
+                    <a:lumOff val="40000"/>
+                  </a:schemeClr>
+                </a:solidFill>
+              </a:rPr>
+              <a:t>Jordan Islamic Bank's app logs </a:t>
+            </a:r>
+            <a:r>
+              <a:rPr lang="en-US" sz="2400" b="1" dirty="0">
+                <a:solidFill>
+                  <a:schemeClr val="accent6">
+                    <a:lumMod val="60000"/>
+                    <a:lumOff val="40000"/>
+                  </a:schemeClr>
+                </a:solidFill>
+              </a:rPr>
+              <a:t>which features users browse most</a:t>
+            </a:r>
+            <a:r>
+              <a:rPr lang="en-US" sz="2400" dirty="0">
+                <a:solidFill>
+                  <a:schemeClr val="accent6">
+                    <a:lumMod val="60000"/>
+                    <a:lumOff val="40000"/>
+                  </a:schemeClr>
+                </a:solidFill>
+              </a:rPr>
+              <a:t>. Users who repeatedly check the investments section get targeted with sukuk product offers.</a:t>
             </a:r>
           </a:p>
         </p:txBody>
@@ -7840,7 +9582,7 @@
 </p:sld>
 </file>
 
-<file path=ppt/slides/slide4.xml><?xml version="1.0" encoding="utf-8"?>
+<file path=ppt/slides/slide7.xml><?xml version="1.0" encoding="utf-8"?>
 <p:sld xmlns:a="http://schemas.openxmlformats.org/drawingml/2006/main" xmlns:r="http://schemas.openxmlformats.org/officeDocument/2006/relationships" xmlns:p="http://schemas.openxmlformats.org/presentationml/2006/main">
   <p:cSld>
     <p:spTree>
@@ -7908,7 +9650,7 @@
         <p:spPr>
           <a:xfrm>
             <a:off x="274320" y="436894"/>
-            <a:ext cx="8622792" cy="4524315"/>
+            <a:ext cx="8622792" cy="4893647"/>
           </a:xfrm>
           <a:prstGeom prst="rect">
             <a:avLst/>
@@ -8007,15 +9749,26 @@
               <a:buChar char="•"/>
             </a:pPr>
             <a:r>
-              <a:rPr lang="en-US" sz="2400" dirty="0">
-                <a:solidFill>
-                  <a:schemeClr val="accent6">
-                    <a:lumMod val="60000"/>
-                    <a:lumOff val="40000"/>
-                  </a:schemeClr>
-                </a:solidFill>
-              </a:rPr>
-              <a:t>Accelerometer data can reveal if you're walking, driving, or stationary</a:t>
+              <a:rPr lang="en-US" sz="2400" b="1" dirty="0">
+                <a:solidFill>
+                  <a:schemeClr val="accent6">
+                    <a:lumMod val="60000"/>
+                    <a:lumOff val="40000"/>
+                  </a:schemeClr>
+                </a:solidFill>
+              </a:rPr>
+              <a:t>Accelerometer data </a:t>
+            </a:r>
+            <a:r>
+              <a:rPr lang="en-US" sz="2400" dirty="0">
+                <a:solidFill>
+                  <a:schemeClr val="accent6">
+                    <a:lumMod val="60000"/>
+                    <a:lumOff val="40000"/>
+                  </a:schemeClr>
+                </a:solidFill>
+              </a:rPr>
+              <a:t>can reveal if you're walking, driving, or stationary</a:t>
             </a:r>
           </a:p>
           <a:p>
@@ -8024,15 +9777,26 @@
               <a:buChar char="•"/>
             </a:pPr>
             <a:r>
-              <a:rPr lang="en-US" sz="2400" dirty="0">
-                <a:solidFill>
-                  <a:schemeClr val="accent6">
-                    <a:lumMod val="60000"/>
-                    <a:lumOff val="40000"/>
-                  </a:schemeClr>
-                </a:solidFill>
-              </a:rPr>
-              <a:t>Screen recording (with permission) captures how long you stare at a loan offer</a:t>
+              <a:rPr lang="en-US" sz="2400" b="1" dirty="0">
+                <a:solidFill>
+                  <a:schemeClr val="accent6">
+                    <a:lumMod val="60000"/>
+                    <a:lumOff val="40000"/>
+                  </a:schemeClr>
+                </a:solidFill>
+              </a:rPr>
+              <a:t>Screen recording </a:t>
+            </a:r>
+            <a:r>
+              <a:rPr lang="en-US" sz="2400" dirty="0">
+                <a:solidFill>
+                  <a:schemeClr val="accent6">
+                    <a:lumMod val="60000"/>
+                    <a:lumOff val="40000"/>
+                  </a:schemeClr>
+                </a:solidFill>
+              </a:rPr>
+              <a:t>(with permission) captures how long you stare at a loan offer</a:t>
             </a:r>
           </a:p>
           <a:p>
@@ -8066,7 +9830,20 @@
                   </a:schemeClr>
                 </a:solidFill>
               </a:rPr>
-              <a:t> Zain Cash tracks whether payments happen in Amman, Zarqa, or Irbid — location shapes what products you're offered next.</a:t>
+              <a:t> </a:t>
+            </a:r>
+          </a:p>
+          <a:p>
+            <a:r>
+              <a:rPr lang="en-US" sz="2400" dirty="0">
+                <a:solidFill>
+                  <a:schemeClr val="accent6">
+                    <a:lumMod val="60000"/>
+                    <a:lumOff val="40000"/>
+                  </a:schemeClr>
+                </a:solidFill>
+              </a:rPr>
+              <a:t>Zain Cash tracks whether payments happen in Amman, Zarqa, or Irbid — location shapes what products you're offered next.</a:t>
             </a:r>
           </a:p>
         </p:txBody>
@@ -8084,7 +9861,227 @@
 </p:sld>
 </file>
 
-<file path=ppt/slides/slide5.xml><?xml version="1.0" encoding="utf-8"?>
+<file path=ppt/slides/slide8.xml><?xml version="1.0" encoding="utf-8"?>
+<p:sld xmlns:a="http://schemas.openxmlformats.org/drawingml/2006/main" xmlns:r="http://schemas.openxmlformats.org/officeDocument/2006/relationships" xmlns:p="http://schemas.openxmlformats.org/presentationml/2006/main">
+  <p:cSld>
+    <p:spTree>
+      <p:nvGrpSpPr>
+        <p:cNvPr id="1" name="">
+          <a:extLst>
+            <a:ext uri="{FF2B5EF4-FFF2-40B4-BE49-F238E27FC236}">
+              <a16:creationId xmlns:a16="http://schemas.microsoft.com/office/drawing/2014/main" id="{A6612C33-92A4-99BA-09C4-9E5C6E6770A4}"/>
+            </a:ext>
+          </a:extLst>
+        </p:cNvPr>
+        <p:cNvGrpSpPr/>
+        <p:nvPr/>
+      </p:nvGrpSpPr>
+      <p:grpSpPr>
+        <a:xfrm>
+          <a:off x="0" y="0"/>
+          <a:ext cx="0" cy="0"/>
+          <a:chOff x="0" y="0"/>
+          <a:chExt cx="0" cy="0"/>
+        </a:xfrm>
+      </p:grpSpPr>
+      <p:pic>
+        <p:nvPicPr>
+          <p:cNvPr id="4" name="Picture 3">
+            <a:extLst>
+              <a:ext uri="{FF2B5EF4-FFF2-40B4-BE49-F238E27FC236}">
+                <a16:creationId xmlns:a16="http://schemas.microsoft.com/office/drawing/2014/main" id="{0C61EB71-495A-5307-14F6-49A00C346F21}"/>
+              </a:ext>
+            </a:extLst>
+          </p:cNvPr>
+          <p:cNvPicPr>
+            <a:picLocks noChangeAspect="1"/>
+          </p:cNvPicPr>
+          <p:nvPr/>
+        </p:nvPicPr>
+        <p:blipFill>
+          <a:blip r:embed="rId2"/>
+          <a:stretch>
+            <a:fillRect/>
+          </a:stretch>
+        </p:blipFill>
+        <p:spPr>
+          <a:xfrm>
+            <a:off x="164592" y="1773030"/>
+            <a:ext cx="11862816" cy="5005314"/>
+          </a:xfrm>
+          <a:prstGeom prst="rect">
+            <a:avLst/>
+          </a:prstGeom>
+        </p:spPr>
+      </p:pic>
+      <p:sp>
+        <p:nvSpPr>
+          <p:cNvPr id="7" name="TextBox 6">
+            <a:extLst>
+              <a:ext uri="{FF2B5EF4-FFF2-40B4-BE49-F238E27FC236}">
+                <a16:creationId xmlns:a16="http://schemas.microsoft.com/office/drawing/2014/main" id="{A26DDF8A-0193-E0E1-87C9-B9514464DF16}"/>
+              </a:ext>
+            </a:extLst>
+          </p:cNvPr>
+          <p:cNvSpPr txBox="1"/>
+          <p:nvPr/>
+        </p:nvSpPr>
+        <p:spPr>
+          <a:xfrm>
+            <a:off x="228600" y="0"/>
+            <a:ext cx="11686032" cy="1754326"/>
+          </a:xfrm>
+          <a:prstGeom prst="rect">
+            <a:avLst/>
+          </a:prstGeom>
+          <a:noFill/>
+        </p:spPr>
+        <p:txBody>
+          <a:bodyPr wrap="square">
+            <a:spAutoFit/>
+          </a:bodyPr>
+          <a:lstStyle/>
+          <a:p>
+            <a:pPr>
+              <a:buNone/>
+            </a:pPr>
+            <a:r>
+              <a:rPr lang="en-US" b="1" dirty="0">
+                <a:solidFill>
+                  <a:schemeClr val="accent6">
+                    <a:lumMod val="60000"/>
+                    <a:lumOff val="40000"/>
+                  </a:schemeClr>
+                </a:solidFill>
+              </a:rPr>
+              <a:t>Story from Hidden Sensor:</a:t>
+            </a:r>
+            <a:r>
+              <a:rPr lang="en-US" dirty="0">
+                <a:solidFill>
+                  <a:schemeClr val="accent6">
+                    <a:lumMod val="60000"/>
+                    <a:lumOff val="40000"/>
+                  </a:schemeClr>
+                </a:solidFill>
+              </a:rPr>
+              <a:t> Customer JO-10033 saw the same loan offer four times in one day. </a:t>
+            </a:r>
+          </a:p>
+          <a:p>
+            <a:pPr>
+              <a:buNone/>
+            </a:pPr>
+            <a:r>
+              <a:rPr lang="en-US" dirty="0">
+                <a:solidFill>
+                  <a:schemeClr val="accent6">
+                    <a:lumMod val="60000"/>
+                    <a:lumOff val="40000"/>
+                  </a:schemeClr>
+                </a:solidFill>
+              </a:rPr>
+              <a:t>Glanced at it for 14 seconds in the morning, 6 seconds while driving on the Amman-Zarqa highway, 11 seconds while walking in </a:t>
+            </a:r>
+            <a:r>
+              <a:rPr lang="en-US" dirty="0" err="1">
+                <a:solidFill>
+                  <a:schemeClr val="accent6">
+                    <a:lumMod val="60000"/>
+                    <a:lumOff val="40000"/>
+                  </a:schemeClr>
+                </a:solidFill>
+              </a:rPr>
+              <a:t>Sweifieh</a:t>
+            </a:r>
+            <a:r>
+              <a:rPr lang="en-US" dirty="0">
+                <a:solidFill>
+                  <a:schemeClr val="accent6">
+                    <a:lumMod val="60000"/>
+                    <a:lumOff val="40000"/>
+                  </a:schemeClr>
+                </a:solidFill>
+              </a:rPr>
+              <a:t> — then at 11pm, sitting stationary at home in Abdoun, stared at it for </a:t>
+            </a:r>
+            <a:r>
+              <a:rPr lang="en-US" b="1" dirty="0">
+                <a:solidFill>
+                  <a:schemeClr val="accent6">
+                    <a:lumMod val="60000"/>
+                    <a:lumOff val="40000"/>
+                  </a:schemeClr>
+                </a:solidFill>
+              </a:rPr>
+              <a:t>187 seconds</a:t>
+            </a:r>
+            <a:r>
+              <a:rPr lang="en-US" dirty="0">
+                <a:solidFill>
+                  <a:schemeClr val="accent6">
+                    <a:lumMod val="60000"/>
+                    <a:lumOff val="40000"/>
+                  </a:schemeClr>
+                </a:solidFill>
+              </a:rPr>
+              <a:t>, scrolled through 98% of it, and came back to it.</a:t>
+            </a:r>
+          </a:p>
+          <a:p>
+            <a:pPr>
+              <a:buNone/>
+            </a:pPr>
+            <a:r>
+              <a:rPr lang="en-US" dirty="0">
+                <a:solidFill>
+                  <a:schemeClr val="accent6">
+                    <a:lumMod val="60000"/>
+                    <a:lumOff val="40000"/>
+                  </a:schemeClr>
+                </a:solidFill>
+              </a:rPr>
+              <a:t>The bank's model now knows: this person is seriously considering this loan. The best moment to send a push notification is late evening, when they are home, stationary, and have time to think. </a:t>
+            </a:r>
+            <a:r>
+              <a:rPr lang="en-US" b="1" dirty="0">
+                <a:solidFill>
+                  <a:schemeClr val="accent6">
+                    <a:lumMod val="60000"/>
+                    <a:lumOff val="40000"/>
+                  </a:schemeClr>
+                </a:solidFill>
+              </a:rPr>
+              <a:t>The accelerometer made that insight possible</a:t>
+            </a:r>
+            <a:r>
+              <a:rPr lang="en-US" dirty="0">
+                <a:solidFill>
+                  <a:schemeClr val="accent6">
+                    <a:lumMod val="60000"/>
+                    <a:lumOff val="40000"/>
+                  </a:schemeClr>
+                </a:solidFill>
+              </a:rPr>
+              <a:t>.</a:t>
+            </a:r>
+          </a:p>
+        </p:txBody>
+      </p:sp>
+    </p:spTree>
+    <p:extLst>
+      <p:ext uri="{BB962C8B-B14F-4D97-AF65-F5344CB8AC3E}">
+        <p14:creationId xmlns:p14="http://schemas.microsoft.com/office/powerpoint/2010/main" val="513875586"/>
+      </p:ext>
+    </p:extLst>
+  </p:cSld>
+  <p:clrMapOvr>
+    <a:masterClrMapping/>
+  </p:clrMapOvr>
+</p:sld>
+</file>
+
+<file path=ppt/slides/slide9.xml><?xml version="1.0" encoding="utf-8"?>
 <p:sld xmlns:a="http://schemas.openxmlformats.org/drawingml/2006/main" xmlns:r="http://schemas.openxmlformats.org/officeDocument/2006/relationships" xmlns:p="http://schemas.openxmlformats.org/presentationml/2006/main">
   <p:cSld>
     <p:spTree>
@@ -8310,1016 +10307,6 @@
     <p:extLst>
       <p:ext uri="{BB962C8B-B14F-4D97-AF65-F5344CB8AC3E}">
         <p14:creationId xmlns:p14="http://schemas.microsoft.com/office/powerpoint/2010/main" val="2412084583"/>
-      </p:ext>
-    </p:extLst>
-  </p:cSld>
-  <p:clrMapOvr>
-    <a:masterClrMapping/>
-  </p:clrMapOvr>
-</p:sld>
-</file>
-
-<file path=ppt/slides/slide6.xml><?xml version="1.0" encoding="utf-8"?>
-<p:sld xmlns:a="http://schemas.openxmlformats.org/drawingml/2006/main" xmlns:r="http://schemas.openxmlformats.org/officeDocument/2006/relationships" xmlns:p="http://schemas.openxmlformats.org/presentationml/2006/main">
-  <p:cSld>
-    <p:spTree>
-      <p:nvGrpSpPr>
-        <p:cNvPr id="1" name="">
-          <a:extLst>
-            <a:ext uri="{FF2B5EF4-FFF2-40B4-BE49-F238E27FC236}">
-              <a16:creationId xmlns:a16="http://schemas.microsoft.com/office/drawing/2014/main" id="{040CB460-3D8F-D080-AE9E-9B01877AAE73}"/>
-            </a:ext>
-          </a:extLst>
-        </p:cNvPr>
-        <p:cNvGrpSpPr/>
-        <p:nvPr/>
-      </p:nvGrpSpPr>
-      <p:grpSpPr>
-        <a:xfrm>
-          <a:off x="0" y="0"/>
-          <a:ext cx="0" cy="0"/>
-          <a:chOff x="0" y="0"/>
-          <a:chExt cx="0" cy="0"/>
-        </a:xfrm>
-      </p:grpSpPr>
-      <p:sp>
-        <p:nvSpPr>
-          <p:cNvPr id="5" name="TextBox 4">
-            <a:extLst>
-              <a:ext uri="{FF2B5EF4-FFF2-40B4-BE49-F238E27FC236}">
-                <a16:creationId xmlns:a16="http://schemas.microsoft.com/office/drawing/2014/main" id="{AEDBF22F-5B71-C490-0153-E3AB1D7442AB}"/>
-              </a:ext>
-            </a:extLst>
-          </p:cNvPr>
-          <p:cNvSpPr txBox="1"/>
-          <p:nvPr/>
-        </p:nvSpPr>
-        <p:spPr>
-          <a:xfrm>
-            <a:off x="274320" y="436894"/>
-            <a:ext cx="8622792" cy="4154984"/>
-          </a:xfrm>
-          <a:prstGeom prst="rect">
-            <a:avLst/>
-          </a:prstGeom>
-          <a:noFill/>
-        </p:spPr>
-        <p:txBody>
-          <a:bodyPr wrap="square">
-            <a:spAutoFit/>
-          </a:bodyPr>
-          <a:lstStyle/>
-          <a:p>
-            <a:r>
-              <a:rPr lang="en-US" sz="2400" b="1" dirty="0">
-                <a:solidFill>
-                  <a:schemeClr val="accent6">
-                    <a:lumMod val="60000"/>
-                    <a:lumOff val="40000"/>
-                  </a:schemeClr>
-                </a:solidFill>
-              </a:rPr>
-              <a:t>Every Payment Tells a Story</a:t>
-            </a:r>
-          </a:p>
-          <a:p>
-            <a:endParaRPr lang="en-US" sz="2400" dirty="0">
-              <a:solidFill>
-                <a:schemeClr val="accent6">
-                  <a:lumMod val="60000"/>
-                  <a:lumOff val="40000"/>
-                </a:schemeClr>
-              </a:solidFill>
-            </a:endParaRPr>
-          </a:p>
-          <a:p>
-            <a:r>
-              <a:rPr lang="en-US" sz="2400" dirty="0">
-                <a:solidFill>
-                  <a:schemeClr val="accent6">
-                    <a:lumMod val="60000"/>
-                    <a:lumOff val="40000"/>
-                  </a:schemeClr>
-                </a:solidFill>
-              </a:rPr>
-              <a:t>A transaction is not just money moving. It's a data point with 20+ attributes attached.</a:t>
-            </a:r>
-          </a:p>
-          <a:p>
-            <a:endParaRPr lang="en-US" sz="2400" dirty="0">
-              <a:solidFill>
-                <a:schemeClr val="accent6">
-                  <a:lumMod val="60000"/>
-                  <a:lumOff val="40000"/>
-                </a:schemeClr>
-              </a:solidFill>
-            </a:endParaRPr>
-          </a:p>
-          <a:p>
-            <a:r>
-              <a:rPr lang="en-US" sz="2400" dirty="0">
-                <a:solidFill>
-                  <a:schemeClr val="accent6">
-                    <a:lumMod val="60000"/>
-                    <a:lumOff val="40000"/>
-                  </a:schemeClr>
-                </a:solidFill>
-              </a:rPr>
-              <a:t>Every payment logs:</a:t>
-            </a:r>
-          </a:p>
-          <a:p>
-            <a:pPr marL="342900" indent="-342900">
-              <a:buFont typeface="Arial" panose="020B0604020202020204" pitchFamily="34" charset="0"/>
-              <a:buChar char="•"/>
-            </a:pPr>
-            <a:r>
-              <a:rPr lang="en-US" sz="2400" dirty="0">
-                <a:solidFill>
-                  <a:schemeClr val="accent6">
-                    <a:lumMod val="60000"/>
-                    <a:lumOff val="40000"/>
-                  </a:schemeClr>
-                </a:solidFill>
-              </a:rPr>
-              <a:t>Amount, currency, time, date</a:t>
-            </a:r>
-          </a:p>
-          <a:p>
-            <a:pPr marL="342900" indent="-342900">
-              <a:buFont typeface="Arial" panose="020B0604020202020204" pitchFamily="34" charset="0"/>
-              <a:buChar char="•"/>
-            </a:pPr>
-            <a:r>
-              <a:rPr lang="en-US" sz="2400" dirty="0">
-                <a:solidFill>
-                  <a:schemeClr val="accent6">
-                    <a:lumMod val="60000"/>
-                    <a:lumOff val="40000"/>
-                  </a:schemeClr>
-                </a:solidFill>
-              </a:rPr>
-              <a:t>Merchant name and category (food, pharmacy, travel...)</a:t>
-            </a:r>
-          </a:p>
-          <a:p>
-            <a:pPr marL="342900" indent="-342900">
-              <a:buFont typeface="Arial" panose="020B0604020202020204" pitchFamily="34" charset="0"/>
-              <a:buChar char="•"/>
-            </a:pPr>
-            <a:r>
-              <a:rPr lang="en-US" sz="2400" dirty="0">
-                <a:solidFill>
-                  <a:schemeClr val="accent6">
-                    <a:lumMod val="60000"/>
-                    <a:lumOff val="40000"/>
-                  </a:schemeClr>
-                </a:solidFill>
-              </a:rPr>
-              <a:t>Location of the merchant</a:t>
-            </a:r>
-          </a:p>
-          <a:p>
-            <a:pPr marL="342900" indent="-342900">
-              <a:buFont typeface="Arial" panose="020B0604020202020204" pitchFamily="34" charset="0"/>
-              <a:buChar char="•"/>
-            </a:pPr>
-            <a:r>
-              <a:rPr lang="en-US" sz="2400" dirty="0">
-                <a:solidFill>
-                  <a:schemeClr val="accent6">
-                    <a:lumMod val="60000"/>
-                    <a:lumOff val="40000"/>
-                  </a:schemeClr>
-                </a:solidFill>
-              </a:rPr>
-              <a:t>Payment method (card, </a:t>
-            </a:r>
-            <a:r>
-              <a:rPr lang="en-US" sz="2400" dirty="0" err="1">
-                <a:solidFill>
-                  <a:schemeClr val="accent6">
-                    <a:lumMod val="60000"/>
-                    <a:lumOff val="40000"/>
-                  </a:schemeClr>
-                </a:solidFill>
-              </a:rPr>
-              <a:t>CliQ</a:t>
-            </a:r>
-            <a:r>
-              <a:rPr lang="en-US" sz="2400" dirty="0">
-                <a:solidFill>
-                  <a:schemeClr val="accent6">
-                    <a:lumMod val="60000"/>
-                    <a:lumOff val="40000"/>
-                  </a:schemeClr>
-                </a:solidFill>
-              </a:rPr>
-              <a:t>, cash deposit)</a:t>
-            </a:r>
-          </a:p>
-          <a:p>
-            <a:pPr marL="342900" indent="-342900">
-              <a:buFont typeface="Arial" panose="020B0604020202020204" pitchFamily="34" charset="0"/>
-              <a:buChar char="•"/>
-            </a:pPr>
-            <a:r>
-              <a:rPr lang="en-US" sz="2400" dirty="0">
-                <a:solidFill>
-                  <a:schemeClr val="accent6">
-                    <a:lumMod val="60000"/>
-                    <a:lumOff val="40000"/>
-                  </a:schemeClr>
-                </a:solidFill>
-              </a:rPr>
-              <a:t>Device used to authorize it</a:t>
-            </a:r>
-          </a:p>
-        </p:txBody>
-      </p:sp>
-      <p:pic>
-        <p:nvPicPr>
-          <p:cNvPr id="4" name="Picture 3">
-            <a:extLst>
-              <a:ext uri="{FF2B5EF4-FFF2-40B4-BE49-F238E27FC236}">
-                <a16:creationId xmlns:a16="http://schemas.microsoft.com/office/drawing/2014/main" id="{36156A38-858A-4794-2E6A-E4B38F782EF7}"/>
-              </a:ext>
-            </a:extLst>
-          </p:cNvPr>
-          <p:cNvPicPr>
-            <a:picLocks noChangeAspect="1"/>
-          </p:cNvPicPr>
-          <p:nvPr/>
-        </p:nvPicPr>
-        <p:blipFill>
-          <a:blip r:embed="rId2"/>
-          <a:stretch>
-            <a:fillRect/>
-          </a:stretch>
-        </p:blipFill>
-        <p:spPr>
-          <a:xfrm>
-            <a:off x="8658316" y="4222546"/>
-            <a:ext cx="3311180" cy="2396795"/>
-          </a:xfrm>
-          <a:prstGeom prst="rect">
-            <a:avLst/>
-          </a:prstGeom>
-        </p:spPr>
-      </p:pic>
-    </p:spTree>
-    <p:extLst>
-      <p:ext uri="{BB962C8B-B14F-4D97-AF65-F5344CB8AC3E}">
-        <p14:creationId xmlns:p14="http://schemas.microsoft.com/office/powerpoint/2010/main" val="2718047956"/>
-      </p:ext>
-    </p:extLst>
-  </p:cSld>
-  <p:clrMapOvr>
-    <a:masterClrMapping/>
-  </p:clrMapOvr>
-</p:sld>
-</file>
-
-<file path=ppt/slides/slide7.xml><?xml version="1.0" encoding="utf-8"?>
-<p:sld xmlns:a="http://schemas.openxmlformats.org/drawingml/2006/main" xmlns:r="http://schemas.openxmlformats.org/officeDocument/2006/relationships" xmlns:p="http://schemas.openxmlformats.org/presentationml/2006/main">
-  <p:cSld>
-    <p:spTree>
-      <p:nvGrpSpPr>
-        <p:cNvPr id="1" name="">
-          <a:extLst>
-            <a:ext uri="{FF2B5EF4-FFF2-40B4-BE49-F238E27FC236}">
-              <a16:creationId xmlns:a16="http://schemas.microsoft.com/office/drawing/2014/main" id="{9F610B79-1529-CECE-89B0-B5F4ADA71D92}"/>
-            </a:ext>
-          </a:extLst>
-        </p:cNvPr>
-        <p:cNvGrpSpPr/>
-        <p:nvPr/>
-      </p:nvGrpSpPr>
-      <p:grpSpPr>
-        <a:xfrm>
-          <a:off x="0" y="0"/>
-          <a:ext cx="0" cy="0"/>
-          <a:chOff x="0" y="0"/>
-          <a:chExt cx="0" cy="0"/>
-        </a:xfrm>
-      </p:grpSpPr>
-      <p:pic>
-        <p:nvPicPr>
-          <p:cNvPr id="4" name="Picture 3">
-            <a:extLst>
-              <a:ext uri="{FF2B5EF4-FFF2-40B4-BE49-F238E27FC236}">
-                <a16:creationId xmlns:a16="http://schemas.microsoft.com/office/drawing/2014/main" id="{C9890EF7-4E19-FCED-97CD-F397E4D9CA8F}"/>
-              </a:ext>
-            </a:extLst>
-          </p:cNvPr>
-          <p:cNvPicPr>
-            <a:picLocks noChangeAspect="1"/>
-          </p:cNvPicPr>
-          <p:nvPr/>
-        </p:nvPicPr>
-        <p:blipFill>
-          <a:blip r:embed="rId2"/>
-          <a:stretch>
-            <a:fillRect/>
-          </a:stretch>
-        </p:blipFill>
-        <p:spPr>
-          <a:xfrm>
-            <a:off x="8658316" y="4222546"/>
-            <a:ext cx="3311180" cy="2396795"/>
-          </a:xfrm>
-          <a:prstGeom prst="rect">
-            <a:avLst/>
-          </a:prstGeom>
-        </p:spPr>
-      </p:pic>
-      <p:sp>
-        <p:nvSpPr>
-          <p:cNvPr id="5" name="TextBox 4">
-            <a:extLst>
-              <a:ext uri="{FF2B5EF4-FFF2-40B4-BE49-F238E27FC236}">
-                <a16:creationId xmlns:a16="http://schemas.microsoft.com/office/drawing/2014/main" id="{912D52A0-0DD7-3B2B-76DE-2C8946E28048}"/>
-              </a:ext>
-            </a:extLst>
-          </p:cNvPr>
-          <p:cNvSpPr txBox="1"/>
-          <p:nvPr/>
-        </p:nvSpPr>
-        <p:spPr>
-          <a:xfrm>
-            <a:off x="274320" y="436894"/>
-            <a:ext cx="8622792" cy="4893647"/>
-          </a:xfrm>
-          <a:prstGeom prst="rect">
-            <a:avLst/>
-          </a:prstGeom>
-          <a:noFill/>
-        </p:spPr>
-        <p:txBody>
-          <a:bodyPr wrap="square">
-            <a:spAutoFit/>
-          </a:bodyPr>
-          <a:lstStyle/>
-          <a:p>
-            <a:r>
-              <a:rPr lang="en-US" sz="2400" b="1" dirty="0">
-                <a:solidFill>
-                  <a:schemeClr val="accent6">
-                    <a:lumMod val="60000"/>
-                    <a:lumOff val="40000"/>
-                  </a:schemeClr>
-                </a:solidFill>
-              </a:rPr>
-              <a:t>Your Spending = Your Life</a:t>
-            </a:r>
-          </a:p>
-          <a:p>
-            <a:endParaRPr lang="en-US" sz="2400" dirty="0">
-              <a:solidFill>
-                <a:schemeClr val="accent6">
-                  <a:lumMod val="60000"/>
-                  <a:lumOff val="40000"/>
-                </a:schemeClr>
-              </a:solidFill>
-            </a:endParaRPr>
-          </a:p>
-          <a:p>
-            <a:r>
-              <a:rPr lang="en-US" sz="2400" dirty="0">
-                <a:solidFill>
-                  <a:schemeClr val="accent6">
-                    <a:lumMod val="60000"/>
-                    <a:lumOff val="40000"/>
-                  </a:schemeClr>
-                </a:solidFill>
-              </a:rPr>
-              <a:t>Over months, transactions reveal things you never consciously shared.</a:t>
-            </a:r>
-          </a:p>
-          <a:p>
-            <a:endParaRPr lang="en-US" sz="2400" dirty="0">
-              <a:solidFill>
-                <a:schemeClr val="accent6">
-                  <a:lumMod val="60000"/>
-                  <a:lumOff val="40000"/>
-                </a:schemeClr>
-              </a:solidFill>
-            </a:endParaRPr>
-          </a:p>
-          <a:p>
-            <a:pPr marL="342900" indent="-342900">
-              <a:buFont typeface="Arial" panose="020B0604020202020204" pitchFamily="34" charset="0"/>
-              <a:buChar char="•"/>
-            </a:pPr>
-            <a:r>
-              <a:rPr lang="en-US" sz="2400" dirty="0">
-                <a:solidFill>
-                  <a:schemeClr val="accent6">
-                    <a:lumMod val="60000"/>
-                    <a:lumOff val="40000"/>
-                  </a:schemeClr>
-                </a:solidFill>
-              </a:rPr>
-              <a:t>Regular pharmacy spend → possible chronic illness</a:t>
-            </a:r>
-          </a:p>
-          <a:p>
-            <a:pPr marL="342900" indent="-342900">
-              <a:buFont typeface="Arial" panose="020B0604020202020204" pitchFamily="34" charset="0"/>
-              <a:buChar char="•"/>
-            </a:pPr>
-            <a:r>
-              <a:rPr lang="en-US" sz="2400" dirty="0">
-                <a:solidFill>
-                  <a:schemeClr val="accent6">
-                    <a:lumMod val="60000"/>
-                    <a:lumOff val="40000"/>
-                  </a:schemeClr>
-                </a:solidFill>
-              </a:rPr>
-              <a:t>Wedding vendors in a short window → getting married</a:t>
-            </a:r>
-          </a:p>
-          <a:p>
-            <a:pPr marL="342900" indent="-342900">
-              <a:buFont typeface="Arial" panose="020B0604020202020204" pitchFamily="34" charset="0"/>
-              <a:buChar char="•"/>
-            </a:pPr>
-            <a:r>
-              <a:rPr lang="en-US" sz="2400" dirty="0">
-                <a:solidFill>
-                  <a:schemeClr val="accent6">
-                    <a:lumMod val="60000"/>
-                    <a:lumOff val="40000"/>
-                  </a:schemeClr>
-                </a:solidFill>
-              </a:rPr>
-              <a:t>Sudden drop in spending → job loss or financial stress</a:t>
-            </a:r>
-          </a:p>
-          <a:p>
-            <a:pPr marL="342900" indent="-342900">
-              <a:buFont typeface="Arial" panose="020B0604020202020204" pitchFamily="34" charset="0"/>
-              <a:buChar char="•"/>
-            </a:pPr>
-            <a:r>
-              <a:rPr lang="en-US" sz="2400" dirty="0">
-                <a:solidFill>
-                  <a:schemeClr val="accent6">
-                    <a:lumMod val="60000"/>
-                    <a:lumOff val="40000"/>
-                  </a:schemeClr>
-                </a:solidFill>
-              </a:rPr>
-              <a:t>Zakat payment in Ramadan → religious observance</a:t>
-            </a:r>
-          </a:p>
-          <a:p>
-            <a:pPr marL="342900" indent="-342900">
-              <a:buFont typeface="Arial" panose="020B0604020202020204" pitchFamily="34" charset="0"/>
-              <a:buChar char="•"/>
-            </a:pPr>
-            <a:endParaRPr lang="en-US" sz="2400" dirty="0">
-              <a:solidFill>
-                <a:schemeClr val="accent6">
-                  <a:lumMod val="60000"/>
-                  <a:lumOff val="40000"/>
-                </a:schemeClr>
-              </a:solidFill>
-            </a:endParaRPr>
-          </a:p>
-          <a:p>
-            <a:r>
-              <a:rPr lang="en-US" sz="2400" b="1" dirty="0">
-                <a:solidFill>
-                  <a:schemeClr val="accent6">
-                    <a:lumMod val="60000"/>
-                    <a:lumOff val="40000"/>
-                  </a:schemeClr>
-                </a:solidFill>
-              </a:rPr>
-              <a:t>Example:</a:t>
-            </a:r>
-            <a:r>
-              <a:rPr lang="en-US" sz="2400" dirty="0">
-                <a:solidFill>
-                  <a:schemeClr val="accent6">
-                    <a:lumMod val="60000"/>
-                    <a:lumOff val="40000"/>
-                  </a:schemeClr>
-                </a:solidFill>
-              </a:rPr>
-              <a:t> </a:t>
-            </a:r>
-            <a:r>
-              <a:rPr lang="en-US" sz="2400" dirty="0" err="1">
-                <a:solidFill>
-                  <a:schemeClr val="accent6">
-                    <a:lumMod val="60000"/>
-                    <a:lumOff val="40000"/>
-                  </a:schemeClr>
-                </a:solidFill>
-              </a:rPr>
-              <a:t>eFawateercom</a:t>
-            </a:r>
-            <a:r>
-              <a:rPr lang="en-US" sz="2400" dirty="0">
-                <a:solidFill>
-                  <a:schemeClr val="accent6">
-                    <a:lumMod val="60000"/>
-                    <a:lumOff val="40000"/>
-                  </a:schemeClr>
-                </a:solidFill>
-              </a:rPr>
-              <a:t> processes electricity, water, and telecom bills for 3M+ Jordanians. Late or missed payments are a direct signal of financial stress — banks can see this.</a:t>
-            </a:r>
-          </a:p>
-        </p:txBody>
-      </p:sp>
-    </p:spTree>
-    <p:extLst>
-      <p:ext uri="{BB962C8B-B14F-4D97-AF65-F5344CB8AC3E}">
-        <p14:creationId xmlns:p14="http://schemas.microsoft.com/office/powerpoint/2010/main" val="3185558444"/>
-      </p:ext>
-    </p:extLst>
-  </p:cSld>
-  <p:clrMapOvr>
-    <a:masterClrMapping/>
-  </p:clrMapOvr>
-</p:sld>
-</file>
-
-<file path=ppt/slides/slide8.xml><?xml version="1.0" encoding="utf-8"?>
-<p:sld xmlns:a="http://schemas.openxmlformats.org/drawingml/2006/main" xmlns:r="http://schemas.openxmlformats.org/officeDocument/2006/relationships" xmlns:p="http://schemas.openxmlformats.org/presentationml/2006/main">
-  <p:cSld>
-    <p:spTree>
-      <p:nvGrpSpPr>
-        <p:cNvPr id="1" name="">
-          <a:extLst>
-            <a:ext uri="{FF2B5EF4-FFF2-40B4-BE49-F238E27FC236}">
-              <a16:creationId xmlns:a16="http://schemas.microsoft.com/office/drawing/2014/main" id="{615F655C-DA67-91E7-26B0-F1A685AF599F}"/>
-            </a:ext>
-          </a:extLst>
-        </p:cNvPr>
-        <p:cNvGrpSpPr/>
-        <p:nvPr/>
-      </p:nvGrpSpPr>
-      <p:grpSpPr>
-        <a:xfrm>
-          <a:off x="0" y="0"/>
-          <a:ext cx="0" cy="0"/>
-          <a:chOff x="0" y="0"/>
-          <a:chExt cx="0" cy="0"/>
-        </a:xfrm>
-      </p:grpSpPr>
-      <p:pic>
-        <p:nvPicPr>
-          <p:cNvPr id="4" name="Picture 3">
-            <a:extLst>
-              <a:ext uri="{FF2B5EF4-FFF2-40B4-BE49-F238E27FC236}">
-                <a16:creationId xmlns:a16="http://schemas.microsoft.com/office/drawing/2014/main" id="{3E6CA3F7-B90C-05E9-23CB-58A0F3683F62}"/>
-              </a:ext>
-            </a:extLst>
-          </p:cNvPr>
-          <p:cNvPicPr>
-            <a:picLocks noChangeAspect="1"/>
-          </p:cNvPicPr>
-          <p:nvPr/>
-        </p:nvPicPr>
-        <p:blipFill>
-          <a:blip r:embed="rId2"/>
-          <a:stretch>
-            <a:fillRect/>
-          </a:stretch>
-        </p:blipFill>
-        <p:spPr>
-          <a:xfrm>
-            <a:off x="8658316" y="4222546"/>
-            <a:ext cx="3311180" cy="2396795"/>
-          </a:xfrm>
-          <a:prstGeom prst="rect">
-            <a:avLst/>
-          </a:prstGeom>
-        </p:spPr>
-      </p:pic>
-      <p:sp>
-        <p:nvSpPr>
-          <p:cNvPr id="5" name="TextBox 4">
-            <a:extLst>
-              <a:ext uri="{FF2B5EF4-FFF2-40B4-BE49-F238E27FC236}">
-                <a16:creationId xmlns:a16="http://schemas.microsoft.com/office/drawing/2014/main" id="{09D54911-713B-23FC-2BEB-9F9906A6C575}"/>
-              </a:ext>
-            </a:extLst>
-          </p:cNvPr>
-          <p:cNvSpPr txBox="1"/>
-          <p:nvPr/>
-        </p:nvSpPr>
-        <p:spPr>
-          <a:xfrm>
-            <a:off x="274320" y="436894"/>
-            <a:ext cx="8622792" cy="6001643"/>
-          </a:xfrm>
-          <a:prstGeom prst="rect">
-            <a:avLst/>
-          </a:prstGeom>
-          <a:noFill/>
-        </p:spPr>
-        <p:txBody>
-          <a:bodyPr wrap="square">
-            <a:spAutoFit/>
-          </a:bodyPr>
-          <a:lstStyle/>
-          <a:p>
-            <a:r>
-              <a:rPr lang="en-US" sz="2400" b="1" dirty="0">
-                <a:solidFill>
-                  <a:schemeClr val="accent6">
-                    <a:lumMod val="60000"/>
-                    <a:lumOff val="40000"/>
-                  </a:schemeClr>
-                </a:solidFill>
-              </a:rPr>
-              <a:t>The Pattern Is Worth More Than the Transaction</a:t>
-            </a:r>
-          </a:p>
-          <a:p>
-            <a:endParaRPr lang="en-US" sz="2400" dirty="0">
-              <a:solidFill>
-                <a:schemeClr val="accent6">
-                  <a:lumMod val="60000"/>
-                  <a:lumOff val="40000"/>
-                </a:schemeClr>
-              </a:solidFill>
-            </a:endParaRPr>
-          </a:p>
-          <a:p>
-            <a:r>
-              <a:rPr lang="en-US" sz="2400" dirty="0">
-                <a:solidFill>
-                  <a:schemeClr val="accent6">
-                    <a:lumMod val="60000"/>
-                    <a:lumOff val="40000"/>
-                  </a:schemeClr>
-                </a:solidFill>
-              </a:rPr>
-              <a:t>One purchase means little. One thousand purchases reveal everything.</a:t>
-            </a:r>
-          </a:p>
-          <a:p>
-            <a:endParaRPr lang="en-US" sz="2400" dirty="0">
-              <a:solidFill>
-                <a:schemeClr val="accent6">
-                  <a:lumMod val="60000"/>
-                  <a:lumOff val="40000"/>
-                </a:schemeClr>
-              </a:solidFill>
-            </a:endParaRPr>
-          </a:p>
-          <a:p>
-            <a:pPr marL="342900" indent="-342900">
-              <a:buFont typeface="Arial" panose="020B0604020202020204" pitchFamily="34" charset="0"/>
-              <a:buChar char="•"/>
-            </a:pPr>
-            <a:r>
-              <a:rPr lang="en-US" sz="2400" dirty="0">
-                <a:solidFill>
-                  <a:schemeClr val="accent6">
-                    <a:lumMod val="60000"/>
-                    <a:lumOff val="40000"/>
-                  </a:schemeClr>
-                </a:solidFill>
-              </a:rPr>
-              <a:t>Where you shop (malls vs local markets in your neighborhood)</a:t>
-            </a:r>
-          </a:p>
-          <a:p>
-            <a:pPr marL="342900" indent="-342900">
-              <a:buFont typeface="Arial" panose="020B0604020202020204" pitchFamily="34" charset="0"/>
-              <a:buChar char="•"/>
-            </a:pPr>
-            <a:r>
-              <a:rPr lang="en-US" sz="2400" dirty="0">
-                <a:solidFill>
-                  <a:schemeClr val="accent6">
-                    <a:lumMod val="60000"/>
-                    <a:lumOff val="40000"/>
-                  </a:schemeClr>
-                </a:solidFill>
-              </a:rPr>
-              <a:t>How you manage money (pay bills early vs always late)</a:t>
-            </a:r>
-          </a:p>
-          <a:p>
-            <a:pPr marL="342900" indent="-342900">
-              <a:buFont typeface="Arial" panose="020B0604020202020204" pitchFamily="34" charset="0"/>
-              <a:buChar char="•"/>
-            </a:pPr>
-            <a:r>
-              <a:rPr lang="en-US" sz="2400" dirty="0">
-                <a:solidFill>
-                  <a:schemeClr val="accent6">
-                    <a:lumMod val="60000"/>
-                    <a:lumOff val="40000"/>
-                  </a:schemeClr>
-                </a:solidFill>
-              </a:rPr>
-              <a:t>What life stage you're in (baby products, school supplies, retirement funds</a:t>
-            </a:r>
-          </a:p>
-          <a:p>
-            <a:endParaRPr lang="en-US" sz="2400" b="1" dirty="0">
-              <a:solidFill>
-                <a:schemeClr val="accent6">
-                  <a:lumMod val="60000"/>
-                  <a:lumOff val="40000"/>
-                </a:schemeClr>
-              </a:solidFill>
-            </a:endParaRPr>
-          </a:p>
-          <a:p>
-            <a:r>
-              <a:rPr lang="en-US" sz="2400" b="1" dirty="0">
-                <a:solidFill>
-                  <a:schemeClr val="accent6">
-                    <a:lumMod val="60000"/>
-                    <a:lumOff val="40000"/>
-                  </a:schemeClr>
-                </a:solidFill>
-              </a:rPr>
-              <a:t>Example:</a:t>
-            </a:r>
-            <a:r>
-              <a:rPr lang="en-US" sz="2400" dirty="0">
-                <a:solidFill>
-                  <a:schemeClr val="accent6">
-                    <a:lumMod val="60000"/>
-                    <a:lumOff val="40000"/>
-                  </a:schemeClr>
-                </a:solidFill>
-              </a:rPr>
-              <a:t> Cairo Amman Bank can tell from transaction data alone whether a customer is likely </a:t>
-            </a:r>
-          </a:p>
-          <a:p>
-            <a:pPr marL="342900" indent="-342900">
-              <a:buFont typeface="Arial" panose="020B0604020202020204" pitchFamily="34" charset="0"/>
-              <a:buChar char="•"/>
-            </a:pPr>
-            <a:r>
-              <a:rPr lang="en-US" sz="2400" dirty="0">
-                <a:solidFill>
-                  <a:schemeClr val="accent6">
-                    <a:lumMod val="60000"/>
-                    <a:lumOff val="40000"/>
-                  </a:schemeClr>
-                </a:solidFill>
-              </a:rPr>
-              <a:t>saving for a house, </a:t>
-            </a:r>
-          </a:p>
-          <a:p>
-            <a:pPr marL="342900" indent="-342900">
-              <a:buFont typeface="Arial" panose="020B0604020202020204" pitchFamily="34" charset="0"/>
-              <a:buChar char="•"/>
-            </a:pPr>
-            <a:r>
-              <a:rPr lang="en-US" sz="2400" dirty="0">
-                <a:solidFill>
-                  <a:schemeClr val="accent6">
-                    <a:lumMod val="60000"/>
-                    <a:lumOff val="40000"/>
-                  </a:schemeClr>
-                </a:solidFill>
-              </a:rPr>
-              <a:t>supporting elderly parents, or </a:t>
-            </a:r>
-          </a:p>
-          <a:p>
-            <a:pPr marL="342900" indent="-342900">
-              <a:buFont typeface="Arial" panose="020B0604020202020204" pitchFamily="34" charset="0"/>
-              <a:buChar char="•"/>
-            </a:pPr>
-            <a:r>
-              <a:rPr lang="en-US" sz="2400" dirty="0">
-                <a:solidFill>
-                  <a:schemeClr val="accent6">
-                    <a:lumMod val="60000"/>
-                    <a:lumOff val="40000"/>
-                  </a:schemeClr>
-                </a:solidFill>
-              </a:rPr>
-              <a:t>sending remittances abroad </a:t>
-            </a:r>
-          </a:p>
-          <a:p>
-            <a:r>
-              <a:rPr lang="en-US" sz="2400" dirty="0">
-                <a:solidFill>
-                  <a:schemeClr val="accent6">
-                    <a:lumMod val="60000"/>
-                    <a:lumOff val="40000"/>
-                  </a:schemeClr>
-                </a:solidFill>
-              </a:rPr>
-              <a:t>— before the customer says a word.</a:t>
-            </a:r>
-          </a:p>
-        </p:txBody>
-      </p:sp>
-    </p:spTree>
-    <p:extLst>
-      <p:ext uri="{BB962C8B-B14F-4D97-AF65-F5344CB8AC3E}">
-        <p14:creationId xmlns:p14="http://schemas.microsoft.com/office/powerpoint/2010/main" val="310511601"/>
-      </p:ext>
-    </p:extLst>
-  </p:cSld>
-  <p:clrMapOvr>
-    <a:masterClrMapping/>
-  </p:clrMapOvr>
-</p:sld>
-</file>
-
-<file path=ppt/slides/slide9.xml><?xml version="1.0" encoding="utf-8"?>
-<p:sld xmlns:a="http://schemas.openxmlformats.org/drawingml/2006/main" xmlns:r="http://schemas.openxmlformats.org/officeDocument/2006/relationships" xmlns:p="http://schemas.openxmlformats.org/presentationml/2006/main">
-  <p:cSld>
-    <p:spTree>
-      <p:nvGrpSpPr>
-        <p:cNvPr id="1" name="">
-          <a:extLst>
-            <a:ext uri="{FF2B5EF4-FFF2-40B4-BE49-F238E27FC236}">
-              <a16:creationId xmlns:a16="http://schemas.microsoft.com/office/drawing/2014/main" id="{922DCB73-C980-75D8-0C3A-612293E2C4D4}"/>
-            </a:ext>
-          </a:extLst>
-        </p:cNvPr>
-        <p:cNvGrpSpPr/>
-        <p:nvPr/>
-      </p:nvGrpSpPr>
-      <p:grpSpPr>
-        <a:xfrm>
-          <a:off x="0" y="0"/>
-          <a:ext cx="0" cy="0"/>
-          <a:chOff x="0" y="0"/>
-          <a:chExt cx="0" cy="0"/>
-        </a:xfrm>
-      </p:grpSpPr>
-      <p:pic>
-        <p:nvPicPr>
-          <p:cNvPr id="4" name="Picture 3">
-            <a:extLst>
-              <a:ext uri="{FF2B5EF4-FFF2-40B4-BE49-F238E27FC236}">
-                <a16:creationId xmlns:a16="http://schemas.microsoft.com/office/drawing/2014/main" id="{65B890CA-32FA-754E-3BEB-75BE524CAD8C}"/>
-              </a:ext>
-            </a:extLst>
-          </p:cNvPr>
-          <p:cNvPicPr>
-            <a:picLocks noChangeAspect="1"/>
-          </p:cNvPicPr>
-          <p:nvPr/>
-        </p:nvPicPr>
-        <p:blipFill>
-          <a:blip r:embed="rId2"/>
-          <a:stretch>
-            <a:fillRect/>
-          </a:stretch>
-        </p:blipFill>
-        <p:spPr>
-          <a:xfrm>
-            <a:off x="8658316" y="4222546"/>
-            <a:ext cx="3311180" cy="2396795"/>
-          </a:xfrm>
-          <a:prstGeom prst="rect">
-            <a:avLst/>
-          </a:prstGeom>
-        </p:spPr>
-      </p:pic>
-      <p:sp>
-        <p:nvSpPr>
-          <p:cNvPr id="5" name="TextBox 4">
-            <a:extLst>
-              <a:ext uri="{FF2B5EF4-FFF2-40B4-BE49-F238E27FC236}">
-                <a16:creationId xmlns:a16="http://schemas.microsoft.com/office/drawing/2014/main" id="{45DCEDDE-B175-EAE5-6F49-B4033BFB7F1C}"/>
-              </a:ext>
-            </a:extLst>
-          </p:cNvPr>
-          <p:cNvSpPr txBox="1"/>
-          <p:nvPr/>
-        </p:nvSpPr>
-        <p:spPr>
-          <a:xfrm>
-            <a:off x="274320" y="436894"/>
-            <a:ext cx="8622792" cy="3785652"/>
-          </a:xfrm>
-          <a:prstGeom prst="rect">
-            <a:avLst/>
-          </a:prstGeom>
-          <a:noFill/>
-        </p:spPr>
-        <p:txBody>
-          <a:bodyPr wrap="square">
-            <a:spAutoFit/>
-          </a:bodyPr>
-          <a:lstStyle/>
-          <a:p>
-            <a:r>
-              <a:rPr lang="en-US" sz="2400" b="1" dirty="0">
-                <a:solidFill>
-                  <a:schemeClr val="accent6">
-                    <a:lumMod val="60000"/>
-                    <a:lumOff val="40000"/>
-                  </a:schemeClr>
-                </a:solidFill>
-              </a:rPr>
-              <a:t>Discussion Question</a:t>
-            </a:r>
-          </a:p>
-          <a:p>
-            <a:endParaRPr lang="en-US" sz="2400" dirty="0">
-              <a:solidFill>
-                <a:schemeClr val="accent6">
-                  <a:lumMod val="60000"/>
-                  <a:lumOff val="40000"/>
-                </a:schemeClr>
-              </a:solidFill>
-            </a:endParaRPr>
-          </a:p>
-          <a:p>
-            <a:r>
-              <a:rPr lang="en-US" sz="2400" dirty="0">
-                <a:solidFill>
-                  <a:schemeClr val="accent6">
-                    <a:lumMod val="60000"/>
-                    <a:lumOff val="40000"/>
-                  </a:schemeClr>
-                </a:solidFill>
-              </a:rPr>
-              <a:t>A young man in Amman has a stable salary but his transaction history shows he spends heavily at restaurants and never saves.</a:t>
-            </a:r>
-          </a:p>
-          <a:p>
-            <a:endParaRPr lang="en-US" sz="2400" dirty="0">
-              <a:solidFill>
-                <a:schemeClr val="accent6">
-                  <a:lumMod val="60000"/>
-                  <a:lumOff val="40000"/>
-                </a:schemeClr>
-              </a:solidFill>
-            </a:endParaRPr>
-          </a:p>
-          <a:p>
-            <a:r>
-              <a:rPr lang="en-US" sz="2400" dirty="0">
-                <a:solidFill>
-                  <a:schemeClr val="accent6">
-                    <a:lumMod val="60000"/>
-                    <a:lumOff val="40000"/>
-                  </a:schemeClr>
-                </a:solidFill>
-              </a:rPr>
-              <a:t> A microfinance company uses this to charge him a higher interest rate than his colleague with the same income.</a:t>
-            </a:r>
-          </a:p>
-          <a:p>
-            <a:endParaRPr lang="en-US" sz="2400" dirty="0">
-              <a:solidFill>
-                <a:schemeClr val="accent6">
-                  <a:lumMod val="60000"/>
-                  <a:lumOff val="40000"/>
-                </a:schemeClr>
-              </a:solidFill>
-            </a:endParaRPr>
-          </a:p>
-          <a:p>
-            <a:r>
-              <a:rPr lang="en-US" sz="2400" dirty="0">
-                <a:solidFill>
-                  <a:schemeClr val="accent6">
-                    <a:lumMod val="60000"/>
-                    <a:lumOff val="40000"/>
-                  </a:schemeClr>
-                </a:solidFill>
-              </a:rPr>
-              <a:t>Is that fair? </a:t>
-            </a:r>
-          </a:p>
-          <a:p>
-            <a:r>
-              <a:rPr lang="en-US" sz="2400" dirty="0">
-                <a:solidFill>
-                  <a:schemeClr val="accent6">
-                    <a:lumMod val="60000"/>
-                    <a:lumOff val="40000"/>
-                  </a:schemeClr>
-                </a:solidFill>
-              </a:rPr>
-              <a:t>Where should companies draw the line?</a:t>
-            </a:r>
-          </a:p>
-        </p:txBody>
-      </p:sp>
-    </p:spTree>
-    <p:extLst>
-      <p:ext uri="{BB962C8B-B14F-4D97-AF65-F5344CB8AC3E}">
-        <p14:creationId xmlns:p14="http://schemas.microsoft.com/office/powerpoint/2010/main" val="3649545384"/>
       </p:ext>
     </p:extLst>
   </p:cSld>
